--- a/AIFinanceCrashcourse/slides/Module-05-Risk-Modelling.pptx
+++ b/AIFinanceCrashcourse/slides/Module-05-Risk-Modelling.pptx
@@ -3830,7 +3830,7 @@
                   <a:srgbClr val="C9A227"/>
                 </a:solidFill>
               </a:rPr>
-              <a:t>ISBMS · PGDM 2025–27 · SEMESTER III · SESSION 5 OF 10</a:t>
+              <a:t>AI IN FINANCE · THE COMPLETE CRASH COURSE · MODULE 5 OF 10</a:t>
             </a:r>
           </a:p>
         </p:txBody>
@@ -3975,7 +3975,7 @@
                   <a:srgbClr val="8FA1C4"/>
                 </a:solidFill>
               </a:rPr>
-              <a:t>Faculty · Agentic AI &amp; Advanced Analytics in Finance (PGDM-SEM3-SPEC-AIFINANCE)</a:t>
+              <a:t>AI in Finance: The Complete Crash Course</a:t>
             </a:r>
           </a:p>
           <a:p>
@@ -3990,7 +3990,7 @@
                   <a:srgbClr val="C9A227"/>
                 </a:solidFill>
               </a:rPr>
-              <a:t>tejasgjadhav.github.io/AIFINANCE</a:t>
+              <a:t>tejasgjadhav.github.io/AIFinanceCrashcourse</a:t>
             </a:r>
           </a:p>
         </p:txBody>
@@ -4268,7 +4268,7 @@
                   <a:srgbClr val="8FA1C4"/>
                 </a:solidFill>
               </a:rPr>
-              <a:t>ISBMS · PGDM 2025–27 · AGENTIC AI &amp; ADVANCED ANALYTICS IN FINANCE</a:t>
+              <a:t>AI IN FINANCE · THE COMPLETE CRASH COURSE</a:t>
             </a:r>
           </a:p>
         </p:txBody>
@@ -4573,7 +4573,7 @@
                   <a:srgbClr val="C9A227"/>
                 </a:solidFill>
               </a:rPr>
-              <a:t>A 99% one-day VaR of ₹6,60,000 means this:  </a:t>
+              <a:t>A 99% one-day VaR of ₹6,60,000 means this:</a:t>
             </a:r>
             <a:r>
               <a:rPr sz="1200" b="0">
@@ -4728,7 +4728,7 @@
                   <a:srgbClr val="C9A227"/>
                 </a:solidFill>
               </a:rPr>
-              <a:t>+  </a:t>
+              <a:t>+</a:t>
             </a:r>
             <a:r>
               <a:rPr sz="1000" b="0">
@@ -4770,7 +4770,7 @@
                   <a:srgbClr val="C9A227"/>
                 </a:solidFill>
               </a:rPr>
-              <a:t>−  </a:t>
+              <a:t>−</a:t>
             </a:r>
             <a:r>
               <a:rPr sz="1000" b="0">
@@ -4925,7 +4925,7 @@
                   <a:srgbClr val="C9A227"/>
                 </a:solidFill>
               </a:rPr>
-              <a:t>+  </a:t>
+              <a:t>+</a:t>
             </a:r>
             <a:r>
               <a:rPr sz="1000" b="0">
@@ -4967,7 +4967,7 @@
                   <a:srgbClr val="C9A227"/>
                 </a:solidFill>
               </a:rPr>
-              <a:t>−  </a:t>
+              <a:t>−</a:t>
             </a:r>
             <a:r>
               <a:rPr sz="1000" b="0">
@@ -5122,7 +5122,7 @@
                   <a:srgbClr val="C9A227"/>
                 </a:solidFill>
               </a:rPr>
-              <a:t>+  </a:t>
+              <a:t>+</a:t>
             </a:r>
             <a:r>
               <a:rPr sz="1000" b="0">
@@ -5164,7 +5164,7 @@
                   <a:srgbClr val="C9A227"/>
                 </a:solidFill>
               </a:rPr>
-              <a:t>−  </a:t>
+              <a:t>−</a:t>
             </a:r>
             <a:r>
               <a:rPr sz="1000" b="0">
@@ -5306,7 +5306,7 @@
                   <a:srgbClr val="5D6B7E"/>
                 </a:solidFill>
               </a:rPr>
-              <a:t>ISBMS · PGDM 2025–27 · AGENTIC AI &amp; ADVANCED ANALYTICS IN FINANCE</a:t>
+              <a:t>AI IN FINANCE · THE COMPLETE CRASH COURSE</a:t>
             </a:r>
           </a:p>
         </p:txBody>
@@ -5775,7 +5775,7 @@
                   <a:srgbClr val="C9A227"/>
                 </a:solidFill>
               </a:rPr>
-              <a:t>▪  </a:t>
+              <a:t>▪</a:t>
             </a:r>
             <a:r>
               <a:rPr sz="1000" b="0">
@@ -5817,7 +5817,7 @@
                   <a:srgbClr val="C9A227"/>
                 </a:solidFill>
               </a:rPr>
-              <a:t>▪  </a:t>
+              <a:t>▪</a:t>
             </a:r>
             <a:r>
               <a:rPr sz="1000" b="0">
@@ -5859,7 +5859,7 @@
                   <a:srgbClr val="C9A227"/>
                 </a:solidFill>
               </a:rPr>
-              <a:t>▪  </a:t>
+              <a:t>▪</a:t>
             </a:r>
             <a:r>
               <a:rPr sz="1000" b="0">
@@ -5901,7 +5901,7 @@
                   <a:srgbClr val="C9A227"/>
                 </a:solidFill>
               </a:rPr>
-              <a:t>▪  </a:t>
+              <a:t>▪</a:t>
             </a:r>
             <a:r>
               <a:rPr sz="1000" b="0">
@@ -6057,7 +6057,7 @@
                   <a:srgbClr val="C9A227"/>
                 </a:solidFill>
               </a:rPr>
-              <a:t>▪  </a:t>
+              <a:t>▪</a:t>
             </a:r>
             <a:r>
               <a:rPr sz="1000" b="0">
@@ -6099,7 +6099,7 @@
                   <a:srgbClr val="C9A227"/>
                 </a:solidFill>
               </a:rPr>
-              <a:t>▪  </a:t>
+              <a:t>▪</a:t>
             </a:r>
             <a:r>
               <a:rPr sz="1000" b="0">
@@ -6141,7 +6141,7 @@
                   <a:srgbClr val="C9A227"/>
                 </a:solidFill>
               </a:rPr>
-              <a:t>▪  </a:t>
+              <a:t>▪</a:t>
             </a:r>
             <a:r>
               <a:rPr sz="1000" b="0">
@@ -6183,7 +6183,7 @@
                   <a:srgbClr val="C9A227"/>
                 </a:solidFill>
               </a:rPr>
-              <a:t>▪  </a:t>
+              <a:t>▪</a:t>
             </a:r>
             <a:r>
               <a:rPr sz="1000" b="0">
@@ -6339,7 +6339,7 @@
                   <a:srgbClr val="C9A227"/>
                 </a:solidFill>
               </a:rPr>
-              <a:t>▪  </a:t>
+              <a:t>▪</a:t>
             </a:r>
             <a:r>
               <a:rPr sz="1000" b="0">
@@ -6381,7 +6381,7 @@
                   <a:srgbClr val="C9A227"/>
                 </a:solidFill>
               </a:rPr>
-              <a:t>▪  </a:t>
+              <a:t>▪</a:t>
             </a:r>
             <a:r>
               <a:rPr sz="1000" b="0">
@@ -6423,7 +6423,7 @@
                   <a:srgbClr val="C9A227"/>
                 </a:solidFill>
               </a:rPr>
-              <a:t>▪  </a:t>
+              <a:t>▪</a:t>
             </a:r>
             <a:r>
               <a:rPr sz="1000" b="0">
@@ -6465,7 +6465,7 @@
                   <a:srgbClr val="C9A227"/>
                 </a:solidFill>
               </a:rPr>
-              <a:t>▪  </a:t>
+              <a:t>▪</a:t>
             </a:r>
             <a:r>
               <a:rPr sz="1000" b="0">
@@ -6597,7 +6597,7 @@
                   <a:srgbClr val="C9A227"/>
                 </a:solidFill>
               </a:rPr>
-              <a:t>Why Part C matters most:  </a:t>
+              <a:t>Why Part C matters most:</a:t>
             </a:r>
             <a:r>
               <a:rPr sz="1200" b="0">
@@ -6639,7 +6639,7 @@
                   <a:srgbClr val="5D6B7E"/>
                 </a:solidFill>
               </a:rPr>
-              <a:t>ISBMS · PGDM 2025–27 · AGENTIC AI &amp; ADVANCED ANALYTICS IN FINANCE</a:t>
+              <a:t>AI IN FINANCE · THE COMPLETE CRASH COURSE</a:t>
             </a:r>
           </a:p>
         </p:txBody>
@@ -6994,7 +6994,7 @@
                   <a:srgbClr val="C9A227"/>
                 </a:solidFill>
               </a:rPr>
-              <a:t>TIP  </a:t>
+              <a:t>TIP</a:t>
             </a:r>
             <a:r>
               <a:rPr sz="900" b="0" dirty="0">
@@ -7176,7 +7176,7 @@
                   <a:srgbClr val="C9A227"/>
                 </a:solidFill>
               </a:rPr>
-              <a:t>TIP  </a:t>
+              <a:t>TIP</a:t>
             </a:r>
             <a:r>
               <a:rPr sz="900" b="0" dirty="0">
@@ -7358,7 +7358,7 @@
                   <a:srgbClr val="C9A227"/>
                 </a:solidFill>
               </a:rPr>
-              <a:t>TIP  </a:t>
+              <a:t>TIP</a:t>
             </a:r>
             <a:r>
               <a:rPr sz="900" b="0" dirty="0">
@@ -7533,7 +7533,7 @@
                   <a:srgbClr val="1B2A41"/>
                 </a:solidFill>
               </a:rPr>
-              <a:t> are different methods of PD Modelling? Is it required for Standardized Approach? How you can use AI for Modelling Risk ?</a:t>
+              <a:t>are different methods of PD Modelling? Is it required for Standardized Approach? How you can use AI for Modelling Risk ?</a:t>
             </a:r>
           </a:p>
           <a:p>
@@ -7552,7 +7552,7 @@
                   <a:srgbClr val="1B2A41"/>
                 </a:solidFill>
               </a:rPr>
-              <a:t>Tip – This is the essence of this module. Please take notes of slides and u should have the answer </a:t>
+              <a:t>Tip – This is the essence of this module. Please take notes of slides and u should have the answer</a:t>
             </a:r>
             <a:r>
               <a:rPr lang="en-US" sz="1050" b="1" dirty="0">
@@ -7725,7 +7725,7 @@
                   <a:srgbClr val="1B2A41"/>
                 </a:solidFill>
               </a:rPr>
-              <a:t>Historical, parametric and Monte Carlo give three different </a:t>
+              <a:t>Historical, parametric and Monte Carlo give three different</a:t>
             </a:r>
             <a:r>
               <a:rPr sz="1050" b="1" dirty="0" err="1">
@@ -7741,7 +7741,7 @@
                   <a:srgbClr val="1B2A41"/>
                 </a:solidFill>
               </a:rPr>
-              <a:t> on one portfolio. Why, and which do you report?</a:t>
+              <a:t>on one portfolio. Why, and which do you report?</a:t>
             </a:r>
           </a:p>
           <a:p>
@@ -7756,7 +7756,7 @@
                   <a:srgbClr val="C9A227"/>
                 </a:solidFill>
               </a:rPr>
-              <a:t>TIP  </a:t>
+              <a:t>TIP</a:t>
             </a:r>
             <a:r>
               <a:rPr sz="900" b="0" dirty="0">
@@ -7938,7 +7938,7 @@
                   <a:srgbClr val="C9A227"/>
                 </a:solidFill>
               </a:rPr>
-              <a:t>TIP  </a:t>
+              <a:t>TIP</a:t>
             </a:r>
             <a:r>
               <a:rPr sz="900" b="0">
@@ -8070,7 +8070,7 @@
                   <a:srgbClr val="C9A227"/>
                 </a:solidFill>
               </a:rPr>
-              <a:t>Before Session 6:  </a:t>
+              <a:t>Before Session 6:</a:t>
             </a:r>
             <a:r>
               <a:rPr sz="1100" b="0">
@@ -8486,7 +8486,7 @@
                   <a:srgbClr val="C9A227"/>
                 </a:solidFill>
               </a:rPr>
-              <a:t>▪  </a:t>
+              <a:t>▪</a:t>
             </a:r>
             <a:r>
               <a:rPr sz="1000" b="0">
@@ -8528,7 +8528,7 @@
                   <a:srgbClr val="C9A227"/>
                 </a:solidFill>
               </a:rPr>
-              <a:t>▪  </a:t>
+              <a:t>▪</a:t>
             </a:r>
             <a:r>
               <a:rPr sz="1000" b="0">
@@ -8570,7 +8570,7 @@
                   <a:srgbClr val="C9A227"/>
                 </a:solidFill>
               </a:rPr>
-              <a:t>▪  </a:t>
+              <a:t>▪</a:t>
             </a:r>
             <a:r>
               <a:rPr sz="1000" b="0">
@@ -8612,7 +8612,7 @@
                   <a:srgbClr val="C9A227"/>
                 </a:solidFill>
               </a:rPr>
-              <a:t>▪  </a:t>
+              <a:t>▪</a:t>
             </a:r>
             <a:r>
               <a:rPr sz="1000" b="0">
@@ -8813,7 +8813,7 @@
                   <a:srgbClr val="C9A227"/>
                 </a:solidFill>
               </a:rPr>
-              <a:t>▪  </a:t>
+              <a:t>▪</a:t>
             </a:r>
             <a:r>
               <a:rPr sz="1000" b="0">
@@ -8855,7 +8855,7 @@
                   <a:srgbClr val="C9A227"/>
                 </a:solidFill>
               </a:rPr>
-              <a:t>▪  </a:t>
+              <a:t>▪</a:t>
             </a:r>
             <a:r>
               <a:rPr sz="1000" b="0">
@@ -8897,7 +8897,7 @@
                   <a:srgbClr val="C9A227"/>
                 </a:solidFill>
               </a:rPr>
-              <a:t>▪  </a:t>
+              <a:t>▪</a:t>
             </a:r>
             <a:r>
               <a:rPr sz="1000" b="0">
@@ -8939,7 +8939,7 @@
                   <a:srgbClr val="C9A227"/>
                 </a:solidFill>
               </a:rPr>
-              <a:t>▪  </a:t>
+              <a:t>▪</a:t>
             </a:r>
             <a:r>
               <a:rPr sz="1000" b="0">
@@ -9140,7 +9140,7 @@
                   <a:srgbClr val="C9A227"/>
                 </a:solidFill>
               </a:rPr>
-              <a:t>▪  </a:t>
+              <a:t>▪</a:t>
             </a:r>
             <a:r>
               <a:rPr sz="1000" b="0">
@@ -9182,7 +9182,7 @@
                   <a:srgbClr val="C9A227"/>
                 </a:solidFill>
               </a:rPr>
-              <a:t>▪  </a:t>
+              <a:t>▪</a:t>
             </a:r>
             <a:r>
               <a:rPr sz="1000" b="0">
@@ -9224,7 +9224,7 @@
                   <a:srgbClr val="C9A227"/>
                 </a:solidFill>
               </a:rPr>
-              <a:t>▪  </a:t>
+              <a:t>▪</a:t>
             </a:r>
             <a:r>
               <a:rPr sz="1000" b="0">
@@ -9266,7 +9266,7 @@
                   <a:srgbClr val="C9A227"/>
                 </a:solidFill>
               </a:rPr>
-              <a:t>▪  </a:t>
+              <a:t>▪</a:t>
             </a:r>
             <a:r>
               <a:rPr sz="1000" b="0">
@@ -9398,7 +9398,7 @@
                   <a:srgbClr val="3A5C9E"/>
                 </a:solidFill>
               </a:rPr>
-              <a:t>THE GRADED ASSIGNMENT IS INTRODUCED TODAY.  </a:t>
+              <a:t>THE GRADED ASSIGNMENT IS INTRODUCED TODAY.</a:t>
             </a:r>
             <a:r>
               <a:rPr sz="1100" b="0">
@@ -9530,7 +9530,7 @@
                   <a:srgbClr val="C9A227"/>
                 </a:solidFill>
               </a:rPr>
-              <a:t>The whole module in one line:  </a:t>
+              <a:t>The whole module in one line:</a:t>
             </a:r>
             <a:r>
               <a:rPr sz="1200" b="0">
@@ -9572,7 +9572,7 @@
                   <a:srgbClr val="5D6B7E"/>
                 </a:solidFill>
               </a:rPr>
-              <a:t>ISBMS · PGDM 2025–27 · AGENTIC AI &amp; ADVANCED ANALYTICS IN FINANCE</a:t>
+              <a:t>AI IN FINANCE · THE COMPLETE CRASH COURSE</a:t>
             </a:r>
           </a:p>
         </p:txBody>
@@ -10014,7 +10014,7 @@
                   <a:srgbClr val="1C2A3A"/>
                 </a:solidFill>
               </a:rPr>
-              <a:t>   AMA (own model)</a:t>
+              <a:t>AMA (own model)</a:t>
             </a:r>
             <a:endParaRPr lang="en-US" sz="1400" dirty="0"/>
           </a:p>
@@ -10194,7 +10194,7 @@
                   <a:srgbClr val="1C2A3A"/>
                 </a:solidFill>
               </a:rPr>
-              <a:t>   Assessment Process)</a:t>
+              <a:t>Assessment Process)</a:t>
             </a:r>
             <a:endParaRPr lang="en-US" sz="1400" dirty="0"/>
           </a:p>
@@ -10881,6 +10881,1268 @@
 </file>
 
 <file path=ppt/slides/slide4.xml><?xml version="1.0" encoding="utf-8"?>
+<p:sld xmlns:a="http://schemas.openxmlformats.org/drawingml/2006/main" xmlns:r="http://schemas.openxmlformats.org/officeDocument/2006/relationships" xmlns:p="http://schemas.openxmlformats.org/presentationml/2006/main">
+  <p:cSld>
+    <p:bg>
+      <p:bgPr>
+        <a:solidFill>
+          <a:srgbClr val="F7F8FA"/>
+        </a:solidFill>
+        <a:effectLst/>
+      </p:bgPr>
+    </p:bg>
+    <p:spTree>
+      <p:nvGrpSpPr>
+        <p:cNvPr id="1" name=""/>
+        <p:cNvGrpSpPr/>
+        <p:nvPr/>
+      </p:nvGrpSpPr>
+      <p:grpSpPr>
+        <a:xfrm>
+          <a:off x="0" y="0"/>
+          <a:ext cx="0" cy="0"/>
+          <a:chOff x="0" y="0"/>
+          <a:chExt cx="0" cy="0"/>
+        </a:xfrm>
+      </p:grpSpPr>
+      <p:sp>
+        <p:nvSpPr>
+          <p:cNvPr id="2" name="Rectangle 1"/>
+          <p:cNvSpPr/>
+          <p:nvPr/>
+        </p:nvSpPr>
+        <p:spPr>
+          <a:xfrm>
+            <a:off x="548640" y="402336"/>
+            <a:ext cx="118872" cy="118872"/>
+          </a:xfrm>
+          <a:prstGeom prst="rect">
+            <a:avLst/>
+          </a:prstGeom>
+          <a:solidFill>
+            <a:srgbClr val="C9A227"/>
+          </a:solidFill>
+          <a:ln>
+            <a:noFill/>
+          </a:ln>
+          <a:effectLst/>
+        </p:spPr>
+        <p:style>
+          <a:lnRef idx="1">
+            <a:schemeClr val="accent1"/>
+          </a:lnRef>
+          <a:fillRef idx="3">
+            <a:schemeClr val="accent1"/>
+          </a:fillRef>
+          <a:effectRef idx="2">
+            <a:schemeClr val="accent1"/>
+          </a:effectRef>
+          <a:fontRef idx="minor">
+            <a:schemeClr val="lt1"/>
+          </a:fontRef>
+        </p:style>
+        <p:txBody>
+          <a:bodyPr rtlCol="0" anchor="ctr"/>
+          <a:lstStyle/>
+          <a:p>
+            <a:pPr algn="ctr"/>
+            <a:endParaRPr/>
+          </a:p>
+        </p:txBody>
+      </p:sp>
+      <p:sp>
+        <p:nvSpPr>
+          <p:cNvPr id="3" name="TextBox 2"/>
+          <p:cNvSpPr txBox="1"/>
+          <p:nvPr/>
+        </p:nvSpPr>
+        <p:spPr>
+          <a:xfrm>
+            <a:off x="786384" y="310896"/>
+            <a:ext cx="10817352" cy="274320"/>
+          </a:xfrm>
+          <a:prstGeom prst="rect">
+            <a:avLst/>
+          </a:prstGeom>
+          <a:noFill/>
+        </p:spPr>
+        <p:txBody>
+          <a:bodyPr wrap="square" lIns="0" tIns="0" rIns="0" bIns="0" anchor="t">
+            <a:spAutoFit/>
+          </a:bodyPr>
+          <a:lstStyle/>
+          <a:p>
+            <a:pPr algn="l"/>
+            <a:r>
+              <a:rPr sz="1100" b="1">
+                <a:solidFill>
+                  <a:srgbClr val="C9A227"/>
+                </a:solidFill>
+              </a:rPr>
+              <a:t>HOUR 1 · CREDIT RISK</a:t>
+            </a:r>
+          </a:p>
+        </p:txBody>
+      </p:sp>
+      <p:sp>
+        <p:nvSpPr>
+          <p:cNvPr id="4" name="TextBox 3"/>
+          <p:cNvSpPr txBox="1"/>
+          <p:nvPr/>
+        </p:nvSpPr>
+        <p:spPr>
+          <a:xfrm>
+            <a:off x="548640" y="621792"/>
+            <a:ext cx="11091672" cy="731520"/>
+          </a:xfrm>
+          <a:prstGeom prst="rect">
+            <a:avLst/>
+          </a:prstGeom>
+          <a:noFill/>
+        </p:spPr>
+        <p:txBody>
+          <a:bodyPr wrap="square" lIns="0" tIns="0" rIns="0" bIns="0" anchor="t">
+            <a:spAutoFit/>
+          </a:bodyPr>
+          <a:lstStyle/>
+          <a:p>
+            <a:pPr algn="l"/>
+            <a:r>
+              <a:rPr sz="2900" b="1">
+                <a:solidFill>
+                  <a:srgbClr val="0F2145"/>
+                </a:solidFill>
+                <a:latin typeface="Georgia"/>
+              </a:rPr>
+              <a:t>Three numbers, one multiplication</a:t>
+            </a:r>
+          </a:p>
+        </p:txBody>
+      </p:sp>
+      <p:sp>
+        <p:nvSpPr>
+          <p:cNvPr id="5" name="Rectangle 4"/>
+          <p:cNvSpPr/>
+          <p:nvPr/>
+        </p:nvSpPr>
+        <p:spPr>
+          <a:xfrm>
+            <a:off x="548640" y="1572768"/>
+            <a:ext cx="3611880" cy="1828800"/>
+          </a:xfrm>
+          <a:prstGeom prst="rect">
+            <a:avLst/>
+          </a:prstGeom>
+          <a:solidFill>
+            <a:srgbClr val="FFFFFF"/>
+          </a:solidFill>
+          <a:ln>
+            <a:noFill/>
+          </a:ln>
+          <a:effectLst/>
+        </p:spPr>
+        <p:style>
+          <a:lnRef idx="1">
+            <a:schemeClr val="accent1"/>
+          </a:lnRef>
+          <a:fillRef idx="3">
+            <a:schemeClr val="accent1"/>
+          </a:fillRef>
+          <a:effectRef idx="2">
+            <a:schemeClr val="accent1"/>
+          </a:effectRef>
+          <a:fontRef idx="minor">
+            <a:schemeClr val="lt1"/>
+          </a:fontRef>
+        </p:style>
+        <p:txBody>
+          <a:bodyPr rtlCol="0" anchor="ctr"/>
+          <a:lstStyle/>
+          <a:p>
+            <a:pPr algn="ctr"/>
+            <a:endParaRPr/>
+          </a:p>
+        </p:txBody>
+      </p:sp>
+      <p:sp>
+        <p:nvSpPr>
+          <p:cNvPr id="6" name="TextBox 5"/>
+          <p:cNvSpPr txBox="1"/>
+          <p:nvPr/>
+        </p:nvSpPr>
+        <p:spPr>
+          <a:xfrm>
+            <a:off x="804672" y="1773936"/>
+            <a:ext cx="1371600" cy="457200"/>
+          </a:xfrm>
+          <a:prstGeom prst="rect">
+            <a:avLst/>
+          </a:prstGeom>
+          <a:noFill/>
+        </p:spPr>
+        <p:txBody>
+          <a:bodyPr wrap="square" lIns="0" tIns="0" rIns="0" bIns="0" anchor="t">
+            <a:spAutoFit/>
+          </a:bodyPr>
+          <a:lstStyle/>
+          <a:p>
+            <a:pPr algn="l"/>
+            <a:r>
+              <a:rPr sz="2600" b="1">
+                <a:solidFill>
+                  <a:srgbClr val="0F2145"/>
+                </a:solidFill>
+                <a:latin typeface="Georgia"/>
+              </a:rPr>
+              <a:t>PD</a:t>
+            </a:r>
+          </a:p>
+        </p:txBody>
+      </p:sp>
+      <p:sp>
+        <p:nvSpPr>
+          <p:cNvPr id="7" name="TextBox 6"/>
+          <p:cNvSpPr txBox="1"/>
+          <p:nvPr/>
+        </p:nvSpPr>
+        <p:spPr>
+          <a:xfrm>
+            <a:off x="804672" y="2286000"/>
+            <a:ext cx="3108960" cy="274320"/>
+          </a:xfrm>
+          <a:prstGeom prst="rect">
+            <a:avLst/>
+          </a:prstGeom>
+          <a:noFill/>
+        </p:spPr>
+        <p:txBody>
+          <a:bodyPr wrap="square" lIns="0" tIns="0" rIns="0" bIns="0" anchor="t">
+            <a:spAutoFit/>
+          </a:bodyPr>
+          <a:lstStyle/>
+          <a:p>
+            <a:pPr algn="l"/>
+            <a:r>
+              <a:rPr sz="1000" b="1">
+                <a:solidFill>
+                  <a:srgbClr val="3A5C9E"/>
+                </a:solidFill>
+              </a:rPr>
+              <a:t>Probability of Default</a:t>
+            </a:r>
+          </a:p>
+        </p:txBody>
+      </p:sp>
+      <p:sp>
+        <p:nvSpPr>
+          <p:cNvPr id="8" name="TextBox 7"/>
+          <p:cNvSpPr txBox="1"/>
+          <p:nvPr/>
+        </p:nvSpPr>
+        <p:spPr>
+          <a:xfrm>
+            <a:off x="804672" y="2596896"/>
+            <a:ext cx="3108960" cy="548640"/>
+          </a:xfrm>
+          <a:prstGeom prst="rect">
+            <a:avLst/>
+          </a:prstGeom>
+          <a:noFill/>
+        </p:spPr>
+        <p:txBody>
+          <a:bodyPr wrap="square" lIns="0" tIns="0" rIns="0" bIns="0" anchor="t">
+            <a:spAutoFit/>
+          </a:bodyPr>
+          <a:lstStyle/>
+          <a:p>
+            <a:pPr algn="l"/>
+            <a:r>
+              <a:rPr sz="1050" b="0">
+                <a:solidFill>
+                  <a:srgbClr val="1B2A41"/>
+                </a:solidFill>
+              </a:rPr>
+              <a:t>How likely is it that this borrower stops paying in the next year?</a:t>
+            </a:r>
+          </a:p>
+        </p:txBody>
+      </p:sp>
+      <p:sp>
+        <p:nvSpPr>
+          <p:cNvPr id="9" name="Rectangle 8"/>
+          <p:cNvSpPr/>
+          <p:nvPr/>
+        </p:nvSpPr>
+        <p:spPr>
+          <a:xfrm>
+            <a:off x="2834640" y="1737360"/>
+            <a:ext cx="1097280" cy="457200"/>
+          </a:xfrm>
+          <a:prstGeom prst="rect">
+            <a:avLst/>
+          </a:prstGeom>
+          <a:solidFill>
+            <a:srgbClr val="E9EFF8"/>
+          </a:solidFill>
+          <a:ln>
+            <a:noFill/>
+          </a:ln>
+          <a:effectLst/>
+        </p:spPr>
+        <p:style>
+          <a:lnRef idx="1">
+            <a:schemeClr val="accent1"/>
+          </a:lnRef>
+          <a:fillRef idx="3">
+            <a:schemeClr val="accent1"/>
+          </a:fillRef>
+          <a:effectRef idx="2">
+            <a:schemeClr val="accent1"/>
+          </a:effectRef>
+          <a:fontRef idx="minor">
+            <a:schemeClr val="lt1"/>
+          </a:fontRef>
+        </p:style>
+        <p:txBody>
+          <a:bodyPr rtlCol="0" anchor="ctr"/>
+          <a:lstStyle/>
+          <a:p>
+            <a:pPr algn="ctr"/>
+            <a:endParaRPr/>
+          </a:p>
+        </p:txBody>
+      </p:sp>
+      <p:sp>
+        <p:nvSpPr>
+          <p:cNvPr id="10" name="TextBox 9"/>
+          <p:cNvSpPr txBox="1"/>
+          <p:nvPr/>
+        </p:nvSpPr>
+        <p:spPr>
+          <a:xfrm>
+            <a:off x="2834640" y="1737360"/>
+            <a:ext cx="1097280" cy="457200"/>
+          </a:xfrm>
+          <a:prstGeom prst="rect">
+            <a:avLst/>
+          </a:prstGeom>
+          <a:noFill/>
+        </p:spPr>
+        <p:txBody>
+          <a:bodyPr wrap="square" lIns="0" tIns="0" rIns="0" bIns="0" anchor="ctr">
+            <a:spAutoFit/>
+          </a:bodyPr>
+          <a:lstStyle/>
+          <a:p>
+            <a:pPr algn="ctr"/>
+            <a:r>
+              <a:rPr sz="1300" b="1">
+                <a:solidFill>
+                  <a:srgbClr val="3A5C9E"/>
+                </a:solidFill>
+              </a:rPr>
+              <a:t>4%</a:t>
+            </a:r>
+          </a:p>
+        </p:txBody>
+      </p:sp>
+      <p:sp>
+        <p:nvSpPr>
+          <p:cNvPr id="11" name="Rectangle 10"/>
+          <p:cNvSpPr/>
+          <p:nvPr/>
+        </p:nvSpPr>
+        <p:spPr>
+          <a:xfrm>
+            <a:off x="4315968" y="1572768"/>
+            <a:ext cx="3611880" cy="1828800"/>
+          </a:xfrm>
+          <a:prstGeom prst="rect">
+            <a:avLst/>
+          </a:prstGeom>
+          <a:solidFill>
+            <a:srgbClr val="FFFFFF"/>
+          </a:solidFill>
+          <a:ln>
+            <a:noFill/>
+          </a:ln>
+          <a:effectLst/>
+        </p:spPr>
+        <p:style>
+          <a:lnRef idx="1">
+            <a:schemeClr val="accent1"/>
+          </a:lnRef>
+          <a:fillRef idx="3">
+            <a:schemeClr val="accent1"/>
+          </a:fillRef>
+          <a:effectRef idx="2">
+            <a:schemeClr val="accent1"/>
+          </a:effectRef>
+          <a:fontRef idx="minor">
+            <a:schemeClr val="lt1"/>
+          </a:fontRef>
+        </p:style>
+        <p:txBody>
+          <a:bodyPr rtlCol="0" anchor="ctr"/>
+          <a:lstStyle/>
+          <a:p>
+            <a:pPr algn="ctr"/>
+            <a:endParaRPr/>
+          </a:p>
+        </p:txBody>
+      </p:sp>
+      <p:sp>
+        <p:nvSpPr>
+          <p:cNvPr id="12" name="TextBox 11"/>
+          <p:cNvSpPr txBox="1"/>
+          <p:nvPr/>
+        </p:nvSpPr>
+        <p:spPr>
+          <a:xfrm>
+            <a:off x="4572000" y="1773936"/>
+            <a:ext cx="1371600" cy="457200"/>
+          </a:xfrm>
+          <a:prstGeom prst="rect">
+            <a:avLst/>
+          </a:prstGeom>
+          <a:noFill/>
+        </p:spPr>
+        <p:txBody>
+          <a:bodyPr wrap="square" lIns="0" tIns="0" rIns="0" bIns="0" anchor="t">
+            <a:spAutoFit/>
+          </a:bodyPr>
+          <a:lstStyle/>
+          <a:p>
+            <a:pPr algn="l"/>
+            <a:r>
+              <a:rPr sz="2600" b="1">
+                <a:solidFill>
+                  <a:srgbClr val="0F2145"/>
+                </a:solidFill>
+                <a:latin typeface="Georgia"/>
+              </a:rPr>
+              <a:t>LGD</a:t>
+            </a:r>
+          </a:p>
+        </p:txBody>
+      </p:sp>
+      <p:sp>
+        <p:nvSpPr>
+          <p:cNvPr id="13" name="TextBox 12"/>
+          <p:cNvSpPr txBox="1"/>
+          <p:nvPr/>
+        </p:nvSpPr>
+        <p:spPr>
+          <a:xfrm>
+            <a:off x="4572000" y="2286000"/>
+            <a:ext cx="3108960" cy="274320"/>
+          </a:xfrm>
+          <a:prstGeom prst="rect">
+            <a:avLst/>
+          </a:prstGeom>
+          <a:noFill/>
+        </p:spPr>
+        <p:txBody>
+          <a:bodyPr wrap="square" lIns="0" tIns="0" rIns="0" bIns="0" anchor="t">
+            <a:spAutoFit/>
+          </a:bodyPr>
+          <a:lstStyle/>
+          <a:p>
+            <a:pPr algn="l"/>
+            <a:r>
+              <a:rPr sz="1000" b="1">
+                <a:solidFill>
+                  <a:srgbClr val="3A5C9E"/>
+                </a:solidFill>
+              </a:rPr>
+              <a:t>Loss Given Default</a:t>
+            </a:r>
+          </a:p>
+        </p:txBody>
+      </p:sp>
+      <p:sp>
+        <p:nvSpPr>
+          <p:cNvPr id="14" name="TextBox 13"/>
+          <p:cNvSpPr txBox="1"/>
+          <p:nvPr/>
+        </p:nvSpPr>
+        <p:spPr>
+          <a:xfrm>
+            <a:off x="4572000" y="2596896"/>
+            <a:ext cx="3108960" cy="548640"/>
+          </a:xfrm>
+          <a:prstGeom prst="rect">
+            <a:avLst/>
+          </a:prstGeom>
+          <a:noFill/>
+        </p:spPr>
+        <p:txBody>
+          <a:bodyPr wrap="square" lIns="0" tIns="0" rIns="0" bIns="0" anchor="t">
+            <a:spAutoFit/>
+          </a:bodyPr>
+          <a:lstStyle/>
+          <a:p>
+            <a:pPr algn="l"/>
+            <a:r>
+              <a:rPr sz="1050" b="0">
+                <a:solidFill>
+                  <a:srgbClr val="1B2A41"/>
+                </a:solidFill>
+              </a:rPr>
+              <a:t>If they do stop, how much of the money do we never get back?</a:t>
+            </a:r>
+          </a:p>
+        </p:txBody>
+      </p:sp>
+      <p:sp>
+        <p:nvSpPr>
+          <p:cNvPr id="15" name="Rectangle 14"/>
+          <p:cNvSpPr/>
+          <p:nvPr/>
+        </p:nvSpPr>
+        <p:spPr>
+          <a:xfrm>
+            <a:off x="6601968" y="1737360"/>
+            <a:ext cx="1097280" cy="457200"/>
+          </a:xfrm>
+          <a:prstGeom prst="rect">
+            <a:avLst/>
+          </a:prstGeom>
+          <a:solidFill>
+            <a:srgbClr val="E9EFF8"/>
+          </a:solidFill>
+          <a:ln>
+            <a:noFill/>
+          </a:ln>
+          <a:effectLst/>
+        </p:spPr>
+        <p:style>
+          <a:lnRef idx="1">
+            <a:schemeClr val="accent1"/>
+          </a:lnRef>
+          <a:fillRef idx="3">
+            <a:schemeClr val="accent1"/>
+          </a:fillRef>
+          <a:effectRef idx="2">
+            <a:schemeClr val="accent1"/>
+          </a:effectRef>
+          <a:fontRef idx="minor">
+            <a:schemeClr val="lt1"/>
+          </a:fontRef>
+        </p:style>
+        <p:txBody>
+          <a:bodyPr rtlCol="0" anchor="ctr"/>
+          <a:lstStyle/>
+          <a:p>
+            <a:pPr algn="ctr"/>
+            <a:endParaRPr/>
+          </a:p>
+        </p:txBody>
+      </p:sp>
+      <p:sp>
+        <p:nvSpPr>
+          <p:cNvPr id="16" name="TextBox 15"/>
+          <p:cNvSpPr txBox="1"/>
+          <p:nvPr/>
+        </p:nvSpPr>
+        <p:spPr>
+          <a:xfrm>
+            <a:off x="6601968" y="1737360"/>
+            <a:ext cx="1097280" cy="457200"/>
+          </a:xfrm>
+          <a:prstGeom prst="rect">
+            <a:avLst/>
+          </a:prstGeom>
+          <a:noFill/>
+        </p:spPr>
+        <p:txBody>
+          <a:bodyPr wrap="square" lIns="0" tIns="0" rIns="0" bIns="0" anchor="ctr">
+            <a:spAutoFit/>
+          </a:bodyPr>
+          <a:lstStyle/>
+          <a:p>
+            <a:pPr algn="ctr"/>
+            <a:r>
+              <a:rPr sz="1300" b="1">
+                <a:solidFill>
+                  <a:srgbClr val="3A5C9E"/>
+                </a:solidFill>
+              </a:rPr>
+              <a:t>45%</a:t>
+            </a:r>
+          </a:p>
+        </p:txBody>
+      </p:sp>
+      <p:sp>
+        <p:nvSpPr>
+          <p:cNvPr id="17" name="Rectangle 16"/>
+          <p:cNvSpPr/>
+          <p:nvPr/>
+        </p:nvSpPr>
+        <p:spPr>
+          <a:xfrm>
+            <a:off x="8083296" y="1572768"/>
+            <a:ext cx="3611880" cy="1828800"/>
+          </a:xfrm>
+          <a:prstGeom prst="rect">
+            <a:avLst/>
+          </a:prstGeom>
+          <a:solidFill>
+            <a:srgbClr val="FFFFFF"/>
+          </a:solidFill>
+          <a:ln>
+            <a:noFill/>
+          </a:ln>
+          <a:effectLst/>
+        </p:spPr>
+        <p:style>
+          <a:lnRef idx="1">
+            <a:schemeClr val="accent1"/>
+          </a:lnRef>
+          <a:fillRef idx="3">
+            <a:schemeClr val="accent1"/>
+          </a:fillRef>
+          <a:effectRef idx="2">
+            <a:schemeClr val="accent1"/>
+          </a:effectRef>
+          <a:fontRef idx="minor">
+            <a:schemeClr val="lt1"/>
+          </a:fontRef>
+        </p:style>
+        <p:txBody>
+          <a:bodyPr rtlCol="0" anchor="ctr"/>
+          <a:lstStyle/>
+          <a:p>
+            <a:pPr algn="ctr"/>
+            <a:endParaRPr/>
+          </a:p>
+        </p:txBody>
+      </p:sp>
+      <p:sp>
+        <p:nvSpPr>
+          <p:cNvPr id="18" name="TextBox 17"/>
+          <p:cNvSpPr txBox="1"/>
+          <p:nvPr/>
+        </p:nvSpPr>
+        <p:spPr>
+          <a:xfrm>
+            <a:off x="8339327" y="1773936"/>
+            <a:ext cx="1371600" cy="457200"/>
+          </a:xfrm>
+          <a:prstGeom prst="rect">
+            <a:avLst/>
+          </a:prstGeom>
+          <a:noFill/>
+        </p:spPr>
+        <p:txBody>
+          <a:bodyPr wrap="square" lIns="0" tIns="0" rIns="0" bIns="0" anchor="t">
+            <a:spAutoFit/>
+          </a:bodyPr>
+          <a:lstStyle/>
+          <a:p>
+            <a:pPr algn="l"/>
+            <a:r>
+              <a:rPr sz="2600" b="1">
+                <a:solidFill>
+                  <a:srgbClr val="0F2145"/>
+                </a:solidFill>
+                <a:latin typeface="Georgia"/>
+              </a:rPr>
+              <a:t>EAD</a:t>
+            </a:r>
+          </a:p>
+        </p:txBody>
+      </p:sp>
+      <p:sp>
+        <p:nvSpPr>
+          <p:cNvPr id="19" name="TextBox 18"/>
+          <p:cNvSpPr txBox="1"/>
+          <p:nvPr/>
+        </p:nvSpPr>
+        <p:spPr>
+          <a:xfrm>
+            <a:off x="8339327" y="2286000"/>
+            <a:ext cx="3108960" cy="274320"/>
+          </a:xfrm>
+          <a:prstGeom prst="rect">
+            <a:avLst/>
+          </a:prstGeom>
+          <a:noFill/>
+        </p:spPr>
+        <p:txBody>
+          <a:bodyPr wrap="square" lIns="0" tIns="0" rIns="0" bIns="0" anchor="t">
+            <a:spAutoFit/>
+          </a:bodyPr>
+          <a:lstStyle/>
+          <a:p>
+            <a:pPr algn="l"/>
+            <a:r>
+              <a:rPr sz="1000" b="1">
+                <a:solidFill>
+                  <a:srgbClr val="3A5C9E"/>
+                </a:solidFill>
+              </a:rPr>
+              <a:t>Exposure at Default</a:t>
+            </a:r>
+          </a:p>
+        </p:txBody>
+      </p:sp>
+      <p:sp>
+        <p:nvSpPr>
+          <p:cNvPr id="20" name="TextBox 19"/>
+          <p:cNvSpPr txBox="1"/>
+          <p:nvPr/>
+        </p:nvSpPr>
+        <p:spPr>
+          <a:xfrm>
+            <a:off x="8339327" y="2596896"/>
+            <a:ext cx="3108960" cy="548640"/>
+          </a:xfrm>
+          <a:prstGeom prst="rect">
+            <a:avLst/>
+          </a:prstGeom>
+          <a:noFill/>
+        </p:spPr>
+        <p:txBody>
+          <a:bodyPr wrap="square" lIns="0" tIns="0" rIns="0" bIns="0" anchor="t">
+            <a:spAutoFit/>
+          </a:bodyPr>
+          <a:lstStyle/>
+          <a:p>
+            <a:pPr algn="l"/>
+            <a:r>
+              <a:rPr sz="1050" b="0">
+                <a:solidFill>
+                  <a:srgbClr val="1B2A41"/>
+                </a:solidFill>
+              </a:rPr>
+              <a:t>How much will actually be outstanding on the day they stop?</a:t>
+            </a:r>
+          </a:p>
+        </p:txBody>
+      </p:sp>
+      <p:sp>
+        <p:nvSpPr>
+          <p:cNvPr id="21" name="Rectangle 20"/>
+          <p:cNvSpPr/>
+          <p:nvPr/>
+        </p:nvSpPr>
+        <p:spPr>
+          <a:xfrm>
+            <a:off x="10369296" y="1737360"/>
+            <a:ext cx="1097280" cy="457200"/>
+          </a:xfrm>
+          <a:prstGeom prst="rect">
+            <a:avLst/>
+          </a:prstGeom>
+          <a:solidFill>
+            <a:srgbClr val="E9EFF8"/>
+          </a:solidFill>
+          <a:ln>
+            <a:noFill/>
+          </a:ln>
+          <a:effectLst/>
+        </p:spPr>
+        <p:style>
+          <a:lnRef idx="1">
+            <a:schemeClr val="accent1"/>
+          </a:lnRef>
+          <a:fillRef idx="3">
+            <a:schemeClr val="accent1"/>
+          </a:fillRef>
+          <a:effectRef idx="2">
+            <a:schemeClr val="accent1"/>
+          </a:effectRef>
+          <a:fontRef idx="minor">
+            <a:schemeClr val="lt1"/>
+          </a:fontRef>
+        </p:style>
+        <p:txBody>
+          <a:bodyPr rtlCol="0" anchor="ctr"/>
+          <a:lstStyle/>
+          <a:p>
+            <a:pPr algn="ctr"/>
+            <a:endParaRPr/>
+          </a:p>
+        </p:txBody>
+      </p:sp>
+      <p:sp>
+        <p:nvSpPr>
+          <p:cNvPr id="22" name="TextBox 21"/>
+          <p:cNvSpPr txBox="1"/>
+          <p:nvPr/>
+        </p:nvSpPr>
+        <p:spPr>
+          <a:xfrm>
+            <a:off x="10369296" y="1737360"/>
+            <a:ext cx="1097280" cy="457200"/>
+          </a:xfrm>
+          <a:prstGeom prst="rect">
+            <a:avLst/>
+          </a:prstGeom>
+          <a:noFill/>
+        </p:spPr>
+        <p:txBody>
+          <a:bodyPr wrap="square" lIns="0" tIns="0" rIns="0" bIns="0" anchor="ctr">
+            <a:spAutoFit/>
+          </a:bodyPr>
+          <a:lstStyle/>
+          <a:p>
+            <a:pPr algn="ctr"/>
+            <a:r>
+              <a:rPr sz="1300" b="1">
+                <a:solidFill>
+                  <a:srgbClr val="3A5C9E"/>
+                </a:solidFill>
+              </a:rPr>
+              <a:t>₹8,00,000</a:t>
+            </a:r>
+          </a:p>
+        </p:txBody>
+      </p:sp>
+      <p:sp>
+        <p:nvSpPr>
+          <p:cNvPr id="23" name="Rectangle 22"/>
+          <p:cNvSpPr/>
+          <p:nvPr/>
+        </p:nvSpPr>
+        <p:spPr>
+          <a:xfrm>
+            <a:off x="548640" y="3584448"/>
+            <a:ext cx="11091672" cy="786384"/>
+          </a:xfrm>
+          <a:prstGeom prst="rect">
+            <a:avLst/>
+          </a:prstGeom>
+          <a:solidFill>
+            <a:srgbClr val="0F2145"/>
+          </a:solidFill>
+          <a:ln>
+            <a:noFill/>
+          </a:ln>
+          <a:effectLst/>
+        </p:spPr>
+        <p:style>
+          <a:lnRef idx="1">
+            <a:schemeClr val="accent1"/>
+          </a:lnRef>
+          <a:fillRef idx="3">
+            <a:schemeClr val="accent1"/>
+          </a:fillRef>
+          <a:effectRef idx="2">
+            <a:schemeClr val="accent1"/>
+          </a:effectRef>
+          <a:fontRef idx="minor">
+            <a:schemeClr val="lt1"/>
+          </a:fontRef>
+        </p:style>
+        <p:txBody>
+          <a:bodyPr rtlCol="0" anchor="ctr"/>
+          <a:lstStyle/>
+          <a:p>
+            <a:pPr algn="ctr"/>
+            <a:endParaRPr/>
+          </a:p>
+        </p:txBody>
+      </p:sp>
+      <p:sp>
+        <p:nvSpPr>
+          <p:cNvPr id="24" name="Rectangle 23"/>
+          <p:cNvSpPr/>
+          <p:nvPr/>
+        </p:nvSpPr>
+        <p:spPr>
+          <a:xfrm>
+            <a:off x="548640" y="3584448"/>
+            <a:ext cx="64008" cy="786384"/>
+          </a:xfrm>
+          <a:prstGeom prst="rect">
+            <a:avLst/>
+          </a:prstGeom>
+          <a:solidFill>
+            <a:srgbClr val="C9A227"/>
+          </a:solidFill>
+          <a:ln>
+            <a:noFill/>
+          </a:ln>
+          <a:effectLst/>
+        </p:spPr>
+        <p:style>
+          <a:lnRef idx="1">
+            <a:schemeClr val="accent1"/>
+          </a:lnRef>
+          <a:fillRef idx="3">
+            <a:schemeClr val="accent1"/>
+          </a:fillRef>
+          <a:effectRef idx="2">
+            <a:schemeClr val="accent1"/>
+          </a:effectRef>
+          <a:fontRef idx="minor">
+            <a:schemeClr val="lt1"/>
+          </a:fontRef>
+        </p:style>
+        <p:txBody>
+          <a:bodyPr rtlCol="0" anchor="ctr"/>
+          <a:lstStyle/>
+          <a:p>
+            <a:pPr algn="ctr"/>
+            <a:endParaRPr/>
+          </a:p>
+        </p:txBody>
+      </p:sp>
+      <p:sp>
+        <p:nvSpPr>
+          <p:cNvPr id="25" name="TextBox 24"/>
+          <p:cNvSpPr txBox="1"/>
+          <p:nvPr/>
+        </p:nvSpPr>
+        <p:spPr>
+          <a:xfrm>
+            <a:off x="868680" y="3584448"/>
+            <a:ext cx="10515600" cy="786384"/>
+          </a:xfrm>
+          <a:prstGeom prst="rect">
+            <a:avLst/>
+          </a:prstGeom>
+          <a:noFill/>
+        </p:spPr>
+        <p:txBody>
+          <a:bodyPr wrap="square" lIns="0" tIns="0" rIns="0" bIns="0" anchor="ctr">
+            <a:spAutoFit/>
+          </a:bodyPr>
+          <a:lstStyle/>
+          <a:p>
+            <a:pPr algn="l"/>
+            <a:r>
+              <a:rPr sz="1700" b="1">
+                <a:solidFill>
+                  <a:srgbClr val="C9A227"/>
+                </a:solidFill>
+                <a:latin typeface="Georgia"/>
+              </a:rPr>
+              <a:t>EXPECTED LOSS  =  PD  ×  LGD  ×  EAD</a:t>
+            </a:r>
+            <a:r>
+              <a:rPr sz="1700" b="1">
+                <a:solidFill>
+                  <a:srgbClr val="FFFFFF"/>
+                </a:solidFill>
+                <a:latin typeface="Georgia"/>
+              </a:rPr>
+              <a:t>4%  ×  45%  ×  ₹8,00,000  =  ₹14,400 per loan</a:t>
+            </a:r>
+          </a:p>
+        </p:txBody>
+      </p:sp>
+      <p:sp>
+        <p:nvSpPr>
+          <p:cNvPr id="26" name="TextBox 25"/>
+          <p:cNvSpPr txBox="1"/>
+          <p:nvPr/>
+        </p:nvSpPr>
+        <p:spPr>
+          <a:xfrm>
+            <a:off x="548640" y="4572000"/>
+            <a:ext cx="5486400" cy="1097280"/>
+          </a:xfrm>
+          <a:prstGeom prst="rect">
+            <a:avLst/>
+          </a:prstGeom>
+          <a:noFill/>
+        </p:spPr>
+        <p:txBody>
+          <a:bodyPr wrap="square" lIns="0" tIns="0" rIns="0" bIns="0" anchor="t">
+            <a:spAutoFit/>
+          </a:bodyPr>
+          <a:lstStyle/>
+          <a:p>
+            <a:pPr algn="l"/>
+            <a:r>
+              <a:rPr sz="1500" b="1">
+                <a:solidFill>
+                  <a:srgbClr val="0F2145"/>
+                </a:solidFill>
+                <a:latin typeface="Georgia"/>
+              </a:rPr>
+              <a:t>Say it in words</a:t>
+            </a:r>
+          </a:p>
+          <a:p>
+            <a:pPr algn="l">
+              <a:spcBef>
+                <a:spcPts val="600"/>
+              </a:spcBef>
+            </a:pPr>
+            <a:r>
+              <a:rPr sz="1150" b="0">
+                <a:solidFill>
+                  <a:srgbClr val="1B2A41"/>
+                </a:solidFill>
+              </a:rPr>
+              <a:t>Out of a hundred loans like this one, four go bad. When one goes bad we lose 45 paise in the rupee on the ₹8 lakh still outstanding. So we price ₹14,400 into every loan, whether it goes bad or not.</a:t>
+            </a:r>
+          </a:p>
+        </p:txBody>
+      </p:sp>
+      <p:sp>
+        <p:nvSpPr>
+          <p:cNvPr id="27" name="TextBox 26"/>
+          <p:cNvSpPr txBox="1"/>
+          <p:nvPr/>
+        </p:nvSpPr>
+        <p:spPr>
+          <a:xfrm>
+            <a:off x="6309360" y="4572000"/>
+            <a:ext cx="5330952" cy="1097280"/>
+          </a:xfrm>
+          <a:prstGeom prst="rect">
+            <a:avLst/>
+          </a:prstGeom>
+          <a:noFill/>
+        </p:spPr>
+        <p:txBody>
+          <a:bodyPr wrap="square" lIns="0" tIns="0" rIns="0" bIns="0" anchor="t">
+            <a:spAutoFit/>
+          </a:bodyPr>
+          <a:lstStyle/>
+          <a:p>
+            <a:pPr algn="l"/>
+            <a:r>
+              <a:rPr sz="1500" b="1">
+                <a:solidFill>
+                  <a:srgbClr val="0F2145"/>
+                </a:solidFill>
+                <a:latin typeface="Georgia"/>
+              </a:rPr>
+              <a:t>The part students miss</a:t>
+            </a:r>
+          </a:p>
+          <a:p>
+            <a:pPr algn="l">
+              <a:spcBef>
+                <a:spcPts val="600"/>
+              </a:spcBef>
+            </a:pPr>
+            <a:r>
+              <a:rPr sz="1150" b="0">
+                <a:solidFill>
+                  <a:srgbClr val="1B2A41"/>
+                </a:solidFill>
+              </a:rPr>
+              <a:t>Expected loss is a cost, not a surprise. It is budgeted and priced in. Capital is held for the UNEXPECTED loss, which is the year four loans becomes eleven.</a:t>
+            </a:r>
+          </a:p>
+        </p:txBody>
+      </p:sp>
+      <p:sp>
+        <p:nvSpPr>
+          <p:cNvPr id="28" name="Rectangle 27"/>
+          <p:cNvSpPr/>
+          <p:nvPr/>
+        </p:nvSpPr>
+        <p:spPr>
+          <a:xfrm>
+            <a:off x="548640" y="5760720"/>
+            <a:ext cx="11091672" cy="603504"/>
+          </a:xfrm>
+          <a:prstGeom prst="rect">
+            <a:avLst/>
+          </a:prstGeom>
+          <a:solidFill>
+            <a:srgbClr val="0F2145"/>
+          </a:solidFill>
+          <a:ln>
+            <a:noFill/>
+          </a:ln>
+          <a:effectLst/>
+        </p:spPr>
+        <p:style>
+          <a:lnRef idx="1">
+            <a:schemeClr val="accent1"/>
+          </a:lnRef>
+          <a:fillRef idx="3">
+            <a:schemeClr val="accent1"/>
+          </a:fillRef>
+          <a:effectRef idx="2">
+            <a:schemeClr val="accent1"/>
+          </a:effectRef>
+          <a:fontRef idx="minor">
+            <a:schemeClr val="lt1"/>
+          </a:fontRef>
+        </p:style>
+        <p:txBody>
+          <a:bodyPr rtlCol="0" anchor="ctr"/>
+          <a:lstStyle/>
+          <a:p>
+            <a:pPr algn="ctr"/>
+            <a:endParaRPr/>
+          </a:p>
+        </p:txBody>
+      </p:sp>
+      <p:sp>
+        <p:nvSpPr>
+          <p:cNvPr id="29" name="Rectangle 28"/>
+          <p:cNvSpPr/>
+          <p:nvPr/>
+        </p:nvSpPr>
+        <p:spPr>
+          <a:xfrm>
+            <a:off x="548640" y="5760720"/>
+            <a:ext cx="64008" cy="603504"/>
+          </a:xfrm>
+          <a:prstGeom prst="rect">
+            <a:avLst/>
+          </a:prstGeom>
+          <a:solidFill>
+            <a:srgbClr val="C9A227"/>
+          </a:solidFill>
+          <a:ln>
+            <a:noFill/>
+          </a:ln>
+          <a:effectLst/>
+        </p:spPr>
+        <p:style>
+          <a:lnRef idx="1">
+            <a:schemeClr val="accent1"/>
+          </a:lnRef>
+          <a:fillRef idx="3">
+            <a:schemeClr val="accent1"/>
+          </a:fillRef>
+          <a:effectRef idx="2">
+            <a:schemeClr val="accent1"/>
+          </a:effectRef>
+          <a:fontRef idx="minor">
+            <a:schemeClr val="lt1"/>
+          </a:fontRef>
+        </p:style>
+        <p:txBody>
+          <a:bodyPr rtlCol="0" anchor="ctr"/>
+          <a:lstStyle/>
+          <a:p>
+            <a:pPr algn="ctr"/>
+            <a:endParaRPr/>
+          </a:p>
+        </p:txBody>
+      </p:sp>
+      <p:sp>
+        <p:nvSpPr>
+          <p:cNvPr id="30" name="TextBox 29"/>
+          <p:cNvSpPr txBox="1"/>
+          <p:nvPr/>
+        </p:nvSpPr>
+        <p:spPr>
+          <a:xfrm>
+            <a:off x="822960" y="5760720"/>
+            <a:ext cx="10543032" cy="603504"/>
+          </a:xfrm>
+          <a:prstGeom prst="rect">
+            <a:avLst/>
+          </a:prstGeom>
+          <a:noFill/>
+        </p:spPr>
+        <p:txBody>
+          <a:bodyPr wrap="square" lIns="0" tIns="0" rIns="0" bIns="0" anchor="ctr">
+            <a:spAutoFit/>
+          </a:bodyPr>
+          <a:lstStyle/>
+          <a:p>
+            <a:pPr algn="l"/>
+            <a:r>
+              <a:rPr sz="1200" b="1">
+                <a:solidFill>
+                  <a:srgbClr val="C9A227"/>
+                </a:solidFill>
+              </a:rPr>
+              <a:t>Basel II, in one sentence:</a:t>
+            </a:r>
+            <a:r>
+              <a:rPr sz="1200" b="0">
+                <a:solidFill>
+                  <a:srgbClr val="FFFFFF"/>
+                </a:solidFill>
+              </a:rPr>
+              <a:t>a bank that can prove its own PD, LGD and EAD models work is allowed to use them to set its own capital.</a:t>
+            </a:r>
+          </a:p>
+        </p:txBody>
+      </p:sp>
+      <p:sp>
+        <p:nvSpPr>
+          <p:cNvPr id="31" name="TextBox 30"/>
+          <p:cNvSpPr txBox="1"/>
+          <p:nvPr/>
+        </p:nvSpPr>
+        <p:spPr>
+          <a:xfrm>
+            <a:off x="548640" y="6473952"/>
+            <a:ext cx="7315200" cy="228600"/>
+          </a:xfrm>
+          <a:prstGeom prst="rect">
+            <a:avLst/>
+          </a:prstGeom>
+          <a:noFill/>
+        </p:spPr>
+        <p:txBody>
+          <a:bodyPr wrap="square" lIns="0" tIns="0" rIns="0" bIns="0" anchor="t">
+            <a:spAutoFit/>
+          </a:bodyPr>
+          <a:lstStyle/>
+          <a:p>
+            <a:pPr algn="l"/>
+            <a:r>
+              <a:rPr sz="800" b="0">
+                <a:solidFill>
+                  <a:srgbClr val="5D6B7E"/>
+                </a:solidFill>
+              </a:rPr>
+              <a:t>AI IN FINANCE · THE COMPLETE CRASH COURSE</a:t>
+            </a:r>
+          </a:p>
+        </p:txBody>
+      </p:sp>
+      <p:sp>
+        <p:nvSpPr>
+          <p:cNvPr id="32" name="TextBox 31"/>
+          <p:cNvSpPr txBox="1"/>
+          <p:nvPr/>
+        </p:nvSpPr>
+        <p:spPr>
+          <a:xfrm>
+            <a:off x="9262872" y="6473952"/>
+            <a:ext cx="2377440" cy="228600"/>
+          </a:xfrm>
+          <a:prstGeom prst="rect">
+            <a:avLst/>
+          </a:prstGeom>
+          <a:noFill/>
+        </p:spPr>
+        <p:txBody>
+          <a:bodyPr wrap="square" lIns="0" tIns="0" rIns="0" bIns="0" anchor="t">
+            <a:spAutoFit/>
+          </a:bodyPr>
+          <a:lstStyle/>
+          <a:p>
+            <a:pPr algn="r"/>
+            <a:r>
+              <a:rPr sz="800" b="0">
+                <a:solidFill>
+                  <a:srgbClr val="5D6B7E"/>
+                </a:solidFill>
+              </a:rPr>
+              <a:t>MODULE 5  ·  04</a:t>
+            </a:r>
+          </a:p>
+        </p:txBody>
+      </p:sp>
+    </p:spTree>
+  </p:cSld>
+  <p:clrMapOvr>
+    <a:masterClrMapping/>
+  </p:clrMapOvr>
+</p:sld>
+</file>
+
+<file path=ppt/slides/slide5.xml><?xml version="1.0" encoding="utf-8"?>
 <p:sld xmlns:a="http://schemas.openxmlformats.org/drawingml/2006/main" xmlns:r="http://schemas.openxmlformats.org/officeDocument/2006/relationships" xmlns:p="http://schemas.openxmlformats.org/presentationml/2006/main">
   <p:cSld>
     <p:spTree>
@@ -13158,1268 +14420,6 @@
 </p:sld>
 </file>
 
-<file path=ppt/slides/slide5.xml><?xml version="1.0" encoding="utf-8"?>
-<p:sld xmlns:a="http://schemas.openxmlformats.org/drawingml/2006/main" xmlns:r="http://schemas.openxmlformats.org/officeDocument/2006/relationships" xmlns:p="http://schemas.openxmlformats.org/presentationml/2006/main">
-  <p:cSld>
-    <p:bg>
-      <p:bgPr>
-        <a:solidFill>
-          <a:srgbClr val="F7F8FA"/>
-        </a:solidFill>
-        <a:effectLst/>
-      </p:bgPr>
-    </p:bg>
-    <p:spTree>
-      <p:nvGrpSpPr>
-        <p:cNvPr id="1" name=""/>
-        <p:cNvGrpSpPr/>
-        <p:nvPr/>
-      </p:nvGrpSpPr>
-      <p:grpSpPr>
-        <a:xfrm>
-          <a:off x="0" y="0"/>
-          <a:ext cx="0" cy="0"/>
-          <a:chOff x="0" y="0"/>
-          <a:chExt cx="0" cy="0"/>
-        </a:xfrm>
-      </p:grpSpPr>
-      <p:sp>
-        <p:nvSpPr>
-          <p:cNvPr id="2" name="Rectangle 1"/>
-          <p:cNvSpPr/>
-          <p:nvPr/>
-        </p:nvSpPr>
-        <p:spPr>
-          <a:xfrm>
-            <a:off x="548640" y="402336"/>
-            <a:ext cx="118872" cy="118872"/>
-          </a:xfrm>
-          <a:prstGeom prst="rect">
-            <a:avLst/>
-          </a:prstGeom>
-          <a:solidFill>
-            <a:srgbClr val="C9A227"/>
-          </a:solidFill>
-          <a:ln>
-            <a:noFill/>
-          </a:ln>
-          <a:effectLst/>
-        </p:spPr>
-        <p:style>
-          <a:lnRef idx="1">
-            <a:schemeClr val="accent1"/>
-          </a:lnRef>
-          <a:fillRef idx="3">
-            <a:schemeClr val="accent1"/>
-          </a:fillRef>
-          <a:effectRef idx="2">
-            <a:schemeClr val="accent1"/>
-          </a:effectRef>
-          <a:fontRef idx="minor">
-            <a:schemeClr val="lt1"/>
-          </a:fontRef>
-        </p:style>
-        <p:txBody>
-          <a:bodyPr rtlCol="0" anchor="ctr"/>
-          <a:lstStyle/>
-          <a:p>
-            <a:pPr algn="ctr"/>
-            <a:endParaRPr/>
-          </a:p>
-        </p:txBody>
-      </p:sp>
-      <p:sp>
-        <p:nvSpPr>
-          <p:cNvPr id="3" name="TextBox 2"/>
-          <p:cNvSpPr txBox="1"/>
-          <p:nvPr/>
-        </p:nvSpPr>
-        <p:spPr>
-          <a:xfrm>
-            <a:off x="786384" y="310896"/>
-            <a:ext cx="10817352" cy="274320"/>
-          </a:xfrm>
-          <a:prstGeom prst="rect">
-            <a:avLst/>
-          </a:prstGeom>
-          <a:noFill/>
-        </p:spPr>
-        <p:txBody>
-          <a:bodyPr wrap="square" lIns="0" tIns="0" rIns="0" bIns="0" anchor="t">
-            <a:spAutoFit/>
-          </a:bodyPr>
-          <a:lstStyle/>
-          <a:p>
-            <a:pPr algn="l"/>
-            <a:r>
-              <a:rPr sz="1100" b="1">
-                <a:solidFill>
-                  <a:srgbClr val="C9A227"/>
-                </a:solidFill>
-              </a:rPr>
-              <a:t>HOUR 1 · CREDIT RISK</a:t>
-            </a:r>
-          </a:p>
-        </p:txBody>
-      </p:sp>
-      <p:sp>
-        <p:nvSpPr>
-          <p:cNvPr id="4" name="TextBox 3"/>
-          <p:cNvSpPr txBox="1"/>
-          <p:nvPr/>
-        </p:nvSpPr>
-        <p:spPr>
-          <a:xfrm>
-            <a:off x="548640" y="621792"/>
-            <a:ext cx="11091672" cy="731520"/>
-          </a:xfrm>
-          <a:prstGeom prst="rect">
-            <a:avLst/>
-          </a:prstGeom>
-          <a:noFill/>
-        </p:spPr>
-        <p:txBody>
-          <a:bodyPr wrap="square" lIns="0" tIns="0" rIns="0" bIns="0" anchor="t">
-            <a:spAutoFit/>
-          </a:bodyPr>
-          <a:lstStyle/>
-          <a:p>
-            <a:pPr algn="l"/>
-            <a:r>
-              <a:rPr sz="2900" b="1">
-                <a:solidFill>
-                  <a:srgbClr val="0F2145"/>
-                </a:solidFill>
-                <a:latin typeface="Georgia"/>
-              </a:rPr>
-              <a:t>Three numbers, one multiplication</a:t>
-            </a:r>
-          </a:p>
-        </p:txBody>
-      </p:sp>
-      <p:sp>
-        <p:nvSpPr>
-          <p:cNvPr id="5" name="Rectangle 4"/>
-          <p:cNvSpPr/>
-          <p:nvPr/>
-        </p:nvSpPr>
-        <p:spPr>
-          <a:xfrm>
-            <a:off x="548640" y="1572768"/>
-            <a:ext cx="3611880" cy="1828800"/>
-          </a:xfrm>
-          <a:prstGeom prst="rect">
-            <a:avLst/>
-          </a:prstGeom>
-          <a:solidFill>
-            <a:srgbClr val="FFFFFF"/>
-          </a:solidFill>
-          <a:ln>
-            <a:noFill/>
-          </a:ln>
-          <a:effectLst/>
-        </p:spPr>
-        <p:style>
-          <a:lnRef idx="1">
-            <a:schemeClr val="accent1"/>
-          </a:lnRef>
-          <a:fillRef idx="3">
-            <a:schemeClr val="accent1"/>
-          </a:fillRef>
-          <a:effectRef idx="2">
-            <a:schemeClr val="accent1"/>
-          </a:effectRef>
-          <a:fontRef idx="minor">
-            <a:schemeClr val="lt1"/>
-          </a:fontRef>
-        </p:style>
-        <p:txBody>
-          <a:bodyPr rtlCol="0" anchor="ctr"/>
-          <a:lstStyle/>
-          <a:p>
-            <a:pPr algn="ctr"/>
-            <a:endParaRPr/>
-          </a:p>
-        </p:txBody>
-      </p:sp>
-      <p:sp>
-        <p:nvSpPr>
-          <p:cNvPr id="6" name="TextBox 5"/>
-          <p:cNvSpPr txBox="1"/>
-          <p:nvPr/>
-        </p:nvSpPr>
-        <p:spPr>
-          <a:xfrm>
-            <a:off x="804672" y="1773936"/>
-            <a:ext cx="1371600" cy="457200"/>
-          </a:xfrm>
-          <a:prstGeom prst="rect">
-            <a:avLst/>
-          </a:prstGeom>
-          <a:noFill/>
-        </p:spPr>
-        <p:txBody>
-          <a:bodyPr wrap="square" lIns="0" tIns="0" rIns="0" bIns="0" anchor="t">
-            <a:spAutoFit/>
-          </a:bodyPr>
-          <a:lstStyle/>
-          <a:p>
-            <a:pPr algn="l"/>
-            <a:r>
-              <a:rPr sz="2600" b="1">
-                <a:solidFill>
-                  <a:srgbClr val="0F2145"/>
-                </a:solidFill>
-                <a:latin typeface="Georgia"/>
-              </a:rPr>
-              <a:t>PD</a:t>
-            </a:r>
-          </a:p>
-        </p:txBody>
-      </p:sp>
-      <p:sp>
-        <p:nvSpPr>
-          <p:cNvPr id="7" name="TextBox 6"/>
-          <p:cNvSpPr txBox="1"/>
-          <p:nvPr/>
-        </p:nvSpPr>
-        <p:spPr>
-          <a:xfrm>
-            <a:off x="804672" y="2286000"/>
-            <a:ext cx="3108960" cy="274320"/>
-          </a:xfrm>
-          <a:prstGeom prst="rect">
-            <a:avLst/>
-          </a:prstGeom>
-          <a:noFill/>
-        </p:spPr>
-        <p:txBody>
-          <a:bodyPr wrap="square" lIns="0" tIns="0" rIns="0" bIns="0" anchor="t">
-            <a:spAutoFit/>
-          </a:bodyPr>
-          <a:lstStyle/>
-          <a:p>
-            <a:pPr algn="l"/>
-            <a:r>
-              <a:rPr sz="1000" b="1">
-                <a:solidFill>
-                  <a:srgbClr val="3A5C9E"/>
-                </a:solidFill>
-              </a:rPr>
-              <a:t>Probability of Default</a:t>
-            </a:r>
-          </a:p>
-        </p:txBody>
-      </p:sp>
-      <p:sp>
-        <p:nvSpPr>
-          <p:cNvPr id="8" name="TextBox 7"/>
-          <p:cNvSpPr txBox="1"/>
-          <p:nvPr/>
-        </p:nvSpPr>
-        <p:spPr>
-          <a:xfrm>
-            <a:off x="804672" y="2596896"/>
-            <a:ext cx="3108960" cy="548640"/>
-          </a:xfrm>
-          <a:prstGeom prst="rect">
-            <a:avLst/>
-          </a:prstGeom>
-          <a:noFill/>
-        </p:spPr>
-        <p:txBody>
-          <a:bodyPr wrap="square" lIns="0" tIns="0" rIns="0" bIns="0" anchor="t">
-            <a:spAutoFit/>
-          </a:bodyPr>
-          <a:lstStyle/>
-          <a:p>
-            <a:pPr algn="l"/>
-            <a:r>
-              <a:rPr sz="1050" b="0">
-                <a:solidFill>
-                  <a:srgbClr val="1B2A41"/>
-                </a:solidFill>
-              </a:rPr>
-              <a:t>How likely is it that this borrower stops paying in the next year?</a:t>
-            </a:r>
-          </a:p>
-        </p:txBody>
-      </p:sp>
-      <p:sp>
-        <p:nvSpPr>
-          <p:cNvPr id="9" name="Rectangle 8"/>
-          <p:cNvSpPr/>
-          <p:nvPr/>
-        </p:nvSpPr>
-        <p:spPr>
-          <a:xfrm>
-            <a:off x="2834640" y="1737360"/>
-            <a:ext cx="1097280" cy="457200"/>
-          </a:xfrm>
-          <a:prstGeom prst="rect">
-            <a:avLst/>
-          </a:prstGeom>
-          <a:solidFill>
-            <a:srgbClr val="E9EFF8"/>
-          </a:solidFill>
-          <a:ln>
-            <a:noFill/>
-          </a:ln>
-          <a:effectLst/>
-        </p:spPr>
-        <p:style>
-          <a:lnRef idx="1">
-            <a:schemeClr val="accent1"/>
-          </a:lnRef>
-          <a:fillRef idx="3">
-            <a:schemeClr val="accent1"/>
-          </a:fillRef>
-          <a:effectRef idx="2">
-            <a:schemeClr val="accent1"/>
-          </a:effectRef>
-          <a:fontRef idx="minor">
-            <a:schemeClr val="lt1"/>
-          </a:fontRef>
-        </p:style>
-        <p:txBody>
-          <a:bodyPr rtlCol="0" anchor="ctr"/>
-          <a:lstStyle/>
-          <a:p>
-            <a:pPr algn="ctr"/>
-            <a:endParaRPr/>
-          </a:p>
-        </p:txBody>
-      </p:sp>
-      <p:sp>
-        <p:nvSpPr>
-          <p:cNvPr id="10" name="TextBox 9"/>
-          <p:cNvSpPr txBox="1"/>
-          <p:nvPr/>
-        </p:nvSpPr>
-        <p:spPr>
-          <a:xfrm>
-            <a:off x="2834640" y="1737360"/>
-            <a:ext cx="1097280" cy="457200"/>
-          </a:xfrm>
-          <a:prstGeom prst="rect">
-            <a:avLst/>
-          </a:prstGeom>
-          <a:noFill/>
-        </p:spPr>
-        <p:txBody>
-          <a:bodyPr wrap="square" lIns="0" tIns="0" rIns="0" bIns="0" anchor="ctr">
-            <a:spAutoFit/>
-          </a:bodyPr>
-          <a:lstStyle/>
-          <a:p>
-            <a:pPr algn="ctr"/>
-            <a:r>
-              <a:rPr sz="1300" b="1">
-                <a:solidFill>
-                  <a:srgbClr val="3A5C9E"/>
-                </a:solidFill>
-              </a:rPr>
-              <a:t>4%</a:t>
-            </a:r>
-          </a:p>
-        </p:txBody>
-      </p:sp>
-      <p:sp>
-        <p:nvSpPr>
-          <p:cNvPr id="11" name="Rectangle 10"/>
-          <p:cNvSpPr/>
-          <p:nvPr/>
-        </p:nvSpPr>
-        <p:spPr>
-          <a:xfrm>
-            <a:off x="4315968" y="1572768"/>
-            <a:ext cx="3611880" cy="1828800"/>
-          </a:xfrm>
-          <a:prstGeom prst="rect">
-            <a:avLst/>
-          </a:prstGeom>
-          <a:solidFill>
-            <a:srgbClr val="FFFFFF"/>
-          </a:solidFill>
-          <a:ln>
-            <a:noFill/>
-          </a:ln>
-          <a:effectLst/>
-        </p:spPr>
-        <p:style>
-          <a:lnRef idx="1">
-            <a:schemeClr val="accent1"/>
-          </a:lnRef>
-          <a:fillRef idx="3">
-            <a:schemeClr val="accent1"/>
-          </a:fillRef>
-          <a:effectRef idx="2">
-            <a:schemeClr val="accent1"/>
-          </a:effectRef>
-          <a:fontRef idx="minor">
-            <a:schemeClr val="lt1"/>
-          </a:fontRef>
-        </p:style>
-        <p:txBody>
-          <a:bodyPr rtlCol="0" anchor="ctr"/>
-          <a:lstStyle/>
-          <a:p>
-            <a:pPr algn="ctr"/>
-            <a:endParaRPr/>
-          </a:p>
-        </p:txBody>
-      </p:sp>
-      <p:sp>
-        <p:nvSpPr>
-          <p:cNvPr id="12" name="TextBox 11"/>
-          <p:cNvSpPr txBox="1"/>
-          <p:nvPr/>
-        </p:nvSpPr>
-        <p:spPr>
-          <a:xfrm>
-            <a:off x="4572000" y="1773936"/>
-            <a:ext cx="1371600" cy="457200"/>
-          </a:xfrm>
-          <a:prstGeom prst="rect">
-            <a:avLst/>
-          </a:prstGeom>
-          <a:noFill/>
-        </p:spPr>
-        <p:txBody>
-          <a:bodyPr wrap="square" lIns="0" tIns="0" rIns="0" bIns="0" anchor="t">
-            <a:spAutoFit/>
-          </a:bodyPr>
-          <a:lstStyle/>
-          <a:p>
-            <a:pPr algn="l"/>
-            <a:r>
-              <a:rPr sz="2600" b="1">
-                <a:solidFill>
-                  <a:srgbClr val="0F2145"/>
-                </a:solidFill>
-                <a:latin typeface="Georgia"/>
-              </a:rPr>
-              <a:t>LGD</a:t>
-            </a:r>
-          </a:p>
-        </p:txBody>
-      </p:sp>
-      <p:sp>
-        <p:nvSpPr>
-          <p:cNvPr id="13" name="TextBox 12"/>
-          <p:cNvSpPr txBox="1"/>
-          <p:nvPr/>
-        </p:nvSpPr>
-        <p:spPr>
-          <a:xfrm>
-            <a:off x="4572000" y="2286000"/>
-            <a:ext cx="3108960" cy="274320"/>
-          </a:xfrm>
-          <a:prstGeom prst="rect">
-            <a:avLst/>
-          </a:prstGeom>
-          <a:noFill/>
-        </p:spPr>
-        <p:txBody>
-          <a:bodyPr wrap="square" lIns="0" tIns="0" rIns="0" bIns="0" anchor="t">
-            <a:spAutoFit/>
-          </a:bodyPr>
-          <a:lstStyle/>
-          <a:p>
-            <a:pPr algn="l"/>
-            <a:r>
-              <a:rPr sz="1000" b="1">
-                <a:solidFill>
-                  <a:srgbClr val="3A5C9E"/>
-                </a:solidFill>
-              </a:rPr>
-              <a:t>Loss Given Default</a:t>
-            </a:r>
-          </a:p>
-        </p:txBody>
-      </p:sp>
-      <p:sp>
-        <p:nvSpPr>
-          <p:cNvPr id="14" name="TextBox 13"/>
-          <p:cNvSpPr txBox="1"/>
-          <p:nvPr/>
-        </p:nvSpPr>
-        <p:spPr>
-          <a:xfrm>
-            <a:off x="4572000" y="2596896"/>
-            <a:ext cx="3108960" cy="548640"/>
-          </a:xfrm>
-          <a:prstGeom prst="rect">
-            <a:avLst/>
-          </a:prstGeom>
-          <a:noFill/>
-        </p:spPr>
-        <p:txBody>
-          <a:bodyPr wrap="square" lIns="0" tIns="0" rIns="0" bIns="0" anchor="t">
-            <a:spAutoFit/>
-          </a:bodyPr>
-          <a:lstStyle/>
-          <a:p>
-            <a:pPr algn="l"/>
-            <a:r>
-              <a:rPr sz="1050" b="0">
-                <a:solidFill>
-                  <a:srgbClr val="1B2A41"/>
-                </a:solidFill>
-              </a:rPr>
-              <a:t>If they do stop, how much of the money do we never get back?</a:t>
-            </a:r>
-          </a:p>
-        </p:txBody>
-      </p:sp>
-      <p:sp>
-        <p:nvSpPr>
-          <p:cNvPr id="15" name="Rectangle 14"/>
-          <p:cNvSpPr/>
-          <p:nvPr/>
-        </p:nvSpPr>
-        <p:spPr>
-          <a:xfrm>
-            <a:off x="6601968" y="1737360"/>
-            <a:ext cx="1097280" cy="457200"/>
-          </a:xfrm>
-          <a:prstGeom prst="rect">
-            <a:avLst/>
-          </a:prstGeom>
-          <a:solidFill>
-            <a:srgbClr val="E9EFF8"/>
-          </a:solidFill>
-          <a:ln>
-            <a:noFill/>
-          </a:ln>
-          <a:effectLst/>
-        </p:spPr>
-        <p:style>
-          <a:lnRef idx="1">
-            <a:schemeClr val="accent1"/>
-          </a:lnRef>
-          <a:fillRef idx="3">
-            <a:schemeClr val="accent1"/>
-          </a:fillRef>
-          <a:effectRef idx="2">
-            <a:schemeClr val="accent1"/>
-          </a:effectRef>
-          <a:fontRef idx="minor">
-            <a:schemeClr val="lt1"/>
-          </a:fontRef>
-        </p:style>
-        <p:txBody>
-          <a:bodyPr rtlCol="0" anchor="ctr"/>
-          <a:lstStyle/>
-          <a:p>
-            <a:pPr algn="ctr"/>
-            <a:endParaRPr/>
-          </a:p>
-        </p:txBody>
-      </p:sp>
-      <p:sp>
-        <p:nvSpPr>
-          <p:cNvPr id="16" name="TextBox 15"/>
-          <p:cNvSpPr txBox="1"/>
-          <p:nvPr/>
-        </p:nvSpPr>
-        <p:spPr>
-          <a:xfrm>
-            <a:off x="6601968" y="1737360"/>
-            <a:ext cx="1097280" cy="457200"/>
-          </a:xfrm>
-          <a:prstGeom prst="rect">
-            <a:avLst/>
-          </a:prstGeom>
-          <a:noFill/>
-        </p:spPr>
-        <p:txBody>
-          <a:bodyPr wrap="square" lIns="0" tIns="0" rIns="0" bIns="0" anchor="ctr">
-            <a:spAutoFit/>
-          </a:bodyPr>
-          <a:lstStyle/>
-          <a:p>
-            <a:pPr algn="ctr"/>
-            <a:r>
-              <a:rPr sz="1300" b="1">
-                <a:solidFill>
-                  <a:srgbClr val="3A5C9E"/>
-                </a:solidFill>
-              </a:rPr>
-              <a:t>45%</a:t>
-            </a:r>
-          </a:p>
-        </p:txBody>
-      </p:sp>
-      <p:sp>
-        <p:nvSpPr>
-          <p:cNvPr id="17" name="Rectangle 16"/>
-          <p:cNvSpPr/>
-          <p:nvPr/>
-        </p:nvSpPr>
-        <p:spPr>
-          <a:xfrm>
-            <a:off x="8083296" y="1572768"/>
-            <a:ext cx="3611880" cy="1828800"/>
-          </a:xfrm>
-          <a:prstGeom prst="rect">
-            <a:avLst/>
-          </a:prstGeom>
-          <a:solidFill>
-            <a:srgbClr val="FFFFFF"/>
-          </a:solidFill>
-          <a:ln>
-            <a:noFill/>
-          </a:ln>
-          <a:effectLst/>
-        </p:spPr>
-        <p:style>
-          <a:lnRef idx="1">
-            <a:schemeClr val="accent1"/>
-          </a:lnRef>
-          <a:fillRef idx="3">
-            <a:schemeClr val="accent1"/>
-          </a:fillRef>
-          <a:effectRef idx="2">
-            <a:schemeClr val="accent1"/>
-          </a:effectRef>
-          <a:fontRef idx="minor">
-            <a:schemeClr val="lt1"/>
-          </a:fontRef>
-        </p:style>
-        <p:txBody>
-          <a:bodyPr rtlCol="0" anchor="ctr"/>
-          <a:lstStyle/>
-          <a:p>
-            <a:pPr algn="ctr"/>
-            <a:endParaRPr/>
-          </a:p>
-        </p:txBody>
-      </p:sp>
-      <p:sp>
-        <p:nvSpPr>
-          <p:cNvPr id="18" name="TextBox 17"/>
-          <p:cNvSpPr txBox="1"/>
-          <p:nvPr/>
-        </p:nvSpPr>
-        <p:spPr>
-          <a:xfrm>
-            <a:off x="8339327" y="1773936"/>
-            <a:ext cx="1371600" cy="457200"/>
-          </a:xfrm>
-          <a:prstGeom prst="rect">
-            <a:avLst/>
-          </a:prstGeom>
-          <a:noFill/>
-        </p:spPr>
-        <p:txBody>
-          <a:bodyPr wrap="square" lIns="0" tIns="0" rIns="0" bIns="0" anchor="t">
-            <a:spAutoFit/>
-          </a:bodyPr>
-          <a:lstStyle/>
-          <a:p>
-            <a:pPr algn="l"/>
-            <a:r>
-              <a:rPr sz="2600" b="1">
-                <a:solidFill>
-                  <a:srgbClr val="0F2145"/>
-                </a:solidFill>
-                <a:latin typeface="Georgia"/>
-              </a:rPr>
-              <a:t>EAD</a:t>
-            </a:r>
-          </a:p>
-        </p:txBody>
-      </p:sp>
-      <p:sp>
-        <p:nvSpPr>
-          <p:cNvPr id="19" name="TextBox 18"/>
-          <p:cNvSpPr txBox="1"/>
-          <p:nvPr/>
-        </p:nvSpPr>
-        <p:spPr>
-          <a:xfrm>
-            <a:off x="8339327" y="2286000"/>
-            <a:ext cx="3108960" cy="274320"/>
-          </a:xfrm>
-          <a:prstGeom prst="rect">
-            <a:avLst/>
-          </a:prstGeom>
-          <a:noFill/>
-        </p:spPr>
-        <p:txBody>
-          <a:bodyPr wrap="square" lIns="0" tIns="0" rIns="0" bIns="0" anchor="t">
-            <a:spAutoFit/>
-          </a:bodyPr>
-          <a:lstStyle/>
-          <a:p>
-            <a:pPr algn="l"/>
-            <a:r>
-              <a:rPr sz="1000" b="1">
-                <a:solidFill>
-                  <a:srgbClr val="3A5C9E"/>
-                </a:solidFill>
-              </a:rPr>
-              <a:t>Exposure at Default</a:t>
-            </a:r>
-          </a:p>
-        </p:txBody>
-      </p:sp>
-      <p:sp>
-        <p:nvSpPr>
-          <p:cNvPr id="20" name="TextBox 19"/>
-          <p:cNvSpPr txBox="1"/>
-          <p:nvPr/>
-        </p:nvSpPr>
-        <p:spPr>
-          <a:xfrm>
-            <a:off x="8339327" y="2596896"/>
-            <a:ext cx="3108960" cy="548640"/>
-          </a:xfrm>
-          <a:prstGeom prst="rect">
-            <a:avLst/>
-          </a:prstGeom>
-          <a:noFill/>
-        </p:spPr>
-        <p:txBody>
-          <a:bodyPr wrap="square" lIns="0" tIns="0" rIns="0" bIns="0" anchor="t">
-            <a:spAutoFit/>
-          </a:bodyPr>
-          <a:lstStyle/>
-          <a:p>
-            <a:pPr algn="l"/>
-            <a:r>
-              <a:rPr sz="1050" b="0">
-                <a:solidFill>
-                  <a:srgbClr val="1B2A41"/>
-                </a:solidFill>
-              </a:rPr>
-              <a:t>How much will actually be outstanding on the day they stop?</a:t>
-            </a:r>
-          </a:p>
-        </p:txBody>
-      </p:sp>
-      <p:sp>
-        <p:nvSpPr>
-          <p:cNvPr id="21" name="Rectangle 20"/>
-          <p:cNvSpPr/>
-          <p:nvPr/>
-        </p:nvSpPr>
-        <p:spPr>
-          <a:xfrm>
-            <a:off x="10369296" y="1737360"/>
-            <a:ext cx="1097280" cy="457200"/>
-          </a:xfrm>
-          <a:prstGeom prst="rect">
-            <a:avLst/>
-          </a:prstGeom>
-          <a:solidFill>
-            <a:srgbClr val="E9EFF8"/>
-          </a:solidFill>
-          <a:ln>
-            <a:noFill/>
-          </a:ln>
-          <a:effectLst/>
-        </p:spPr>
-        <p:style>
-          <a:lnRef idx="1">
-            <a:schemeClr val="accent1"/>
-          </a:lnRef>
-          <a:fillRef idx="3">
-            <a:schemeClr val="accent1"/>
-          </a:fillRef>
-          <a:effectRef idx="2">
-            <a:schemeClr val="accent1"/>
-          </a:effectRef>
-          <a:fontRef idx="minor">
-            <a:schemeClr val="lt1"/>
-          </a:fontRef>
-        </p:style>
-        <p:txBody>
-          <a:bodyPr rtlCol="0" anchor="ctr"/>
-          <a:lstStyle/>
-          <a:p>
-            <a:pPr algn="ctr"/>
-            <a:endParaRPr/>
-          </a:p>
-        </p:txBody>
-      </p:sp>
-      <p:sp>
-        <p:nvSpPr>
-          <p:cNvPr id="22" name="TextBox 21"/>
-          <p:cNvSpPr txBox="1"/>
-          <p:nvPr/>
-        </p:nvSpPr>
-        <p:spPr>
-          <a:xfrm>
-            <a:off x="10369296" y="1737360"/>
-            <a:ext cx="1097280" cy="457200"/>
-          </a:xfrm>
-          <a:prstGeom prst="rect">
-            <a:avLst/>
-          </a:prstGeom>
-          <a:noFill/>
-        </p:spPr>
-        <p:txBody>
-          <a:bodyPr wrap="square" lIns="0" tIns="0" rIns="0" bIns="0" anchor="ctr">
-            <a:spAutoFit/>
-          </a:bodyPr>
-          <a:lstStyle/>
-          <a:p>
-            <a:pPr algn="ctr"/>
-            <a:r>
-              <a:rPr sz="1300" b="1">
-                <a:solidFill>
-                  <a:srgbClr val="3A5C9E"/>
-                </a:solidFill>
-              </a:rPr>
-              <a:t>₹8,00,000</a:t>
-            </a:r>
-          </a:p>
-        </p:txBody>
-      </p:sp>
-      <p:sp>
-        <p:nvSpPr>
-          <p:cNvPr id="23" name="Rectangle 22"/>
-          <p:cNvSpPr/>
-          <p:nvPr/>
-        </p:nvSpPr>
-        <p:spPr>
-          <a:xfrm>
-            <a:off x="548640" y="3584448"/>
-            <a:ext cx="11091672" cy="786384"/>
-          </a:xfrm>
-          <a:prstGeom prst="rect">
-            <a:avLst/>
-          </a:prstGeom>
-          <a:solidFill>
-            <a:srgbClr val="0F2145"/>
-          </a:solidFill>
-          <a:ln>
-            <a:noFill/>
-          </a:ln>
-          <a:effectLst/>
-        </p:spPr>
-        <p:style>
-          <a:lnRef idx="1">
-            <a:schemeClr val="accent1"/>
-          </a:lnRef>
-          <a:fillRef idx="3">
-            <a:schemeClr val="accent1"/>
-          </a:fillRef>
-          <a:effectRef idx="2">
-            <a:schemeClr val="accent1"/>
-          </a:effectRef>
-          <a:fontRef idx="minor">
-            <a:schemeClr val="lt1"/>
-          </a:fontRef>
-        </p:style>
-        <p:txBody>
-          <a:bodyPr rtlCol="0" anchor="ctr"/>
-          <a:lstStyle/>
-          <a:p>
-            <a:pPr algn="ctr"/>
-            <a:endParaRPr/>
-          </a:p>
-        </p:txBody>
-      </p:sp>
-      <p:sp>
-        <p:nvSpPr>
-          <p:cNvPr id="24" name="Rectangle 23"/>
-          <p:cNvSpPr/>
-          <p:nvPr/>
-        </p:nvSpPr>
-        <p:spPr>
-          <a:xfrm>
-            <a:off x="548640" y="3584448"/>
-            <a:ext cx="64008" cy="786384"/>
-          </a:xfrm>
-          <a:prstGeom prst="rect">
-            <a:avLst/>
-          </a:prstGeom>
-          <a:solidFill>
-            <a:srgbClr val="C9A227"/>
-          </a:solidFill>
-          <a:ln>
-            <a:noFill/>
-          </a:ln>
-          <a:effectLst/>
-        </p:spPr>
-        <p:style>
-          <a:lnRef idx="1">
-            <a:schemeClr val="accent1"/>
-          </a:lnRef>
-          <a:fillRef idx="3">
-            <a:schemeClr val="accent1"/>
-          </a:fillRef>
-          <a:effectRef idx="2">
-            <a:schemeClr val="accent1"/>
-          </a:effectRef>
-          <a:fontRef idx="minor">
-            <a:schemeClr val="lt1"/>
-          </a:fontRef>
-        </p:style>
-        <p:txBody>
-          <a:bodyPr rtlCol="0" anchor="ctr"/>
-          <a:lstStyle/>
-          <a:p>
-            <a:pPr algn="ctr"/>
-            <a:endParaRPr/>
-          </a:p>
-        </p:txBody>
-      </p:sp>
-      <p:sp>
-        <p:nvSpPr>
-          <p:cNvPr id="25" name="TextBox 24"/>
-          <p:cNvSpPr txBox="1"/>
-          <p:nvPr/>
-        </p:nvSpPr>
-        <p:spPr>
-          <a:xfrm>
-            <a:off x="868680" y="3584448"/>
-            <a:ext cx="10515600" cy="786384"/>
-          </a:xfrm>
-          <a:prstGeom prst="rect">
-            <a:avLst/>
-          </a:prstGeom>
-          <a:noFill/>
-        </p:spPr>
-        <p:txBody>
-          <a:bodyPr wrap="square" lIns="0" tIns="0" rIns="0" bIns="0" anchor="ctr">
-            <a:spAutoFit/>
-          </a:bodyPr>
-          <a:lstStyle/>
-          <a:p>
-            <a:pPr algn="l"/>
-            <a:r>
-              <a:rPr sz="1700" b="1">
-                <a:solidFill>
-                  <a:srgbClr val="C9A227"/>
-                </a:solidFill>
-                <a:latin typeface="Georgia"/>
-              </a:rPr>
-              <a:t>EXPECTED LOSS  =  PD  ×  LGD  ×  EAD      </a:t>
-            </a:r>
-            <a:r>
-              <a:rPr sz="1700" b="1">
-                <a:solidFill>
-                  <a:srgbClr val="FFFFFF"/>
-                </a:solidFill>
-                <a:latin typeface="Georgia"/>
-              </a:rPr>
-              <a:t>4%  ×  45%  ×  ₹8,00,000  =  ₹14,400 per loan</a:t>
-            </a:r>
-          </a:p>
-        </p:txBody>
-      </p:sp>
-      <p:sp>
-        <p:nvSpPr>
-          <p:cNvPr id="26" name="TextBox 25"/>
-          <p:cNvSpPr txBox="1"/>
-          <p:nvPr/>
-        </p:nvSpPr>
-        <p:spPr>
-          <a:xfrm>
-            <a:off x="548640" y="4572000"/>
-            <a:ext cx="5486400" cy="1097280"/>
-          </a:xfrm>
-          <a:prstGeom prst="rect">
-            <a:avLst/>
-          </a:prstGeom>
-          <a:noFill/>
-        </p:spPr>
-        <p:txBody>
-          <a:bodyPr wrap="square" lIns="0" tIns="0" rIns="0" bIns="0" anchor="t">
-            <a:spAutoFit/>
-          </a:bodyPr>
-          <a:lstStyle/>
-          <a:p>
-            <a:pPr algn="l"/>
-            <a:r>
-              <a:rPr sz="1500" b="1">
-                <a:solidFill>
-                  <a:srgbClr val="0F2145"/>
-                </a:solidFill>
-                <a:latin typeface="Georgia"/>
-              </a:rPr>
-              <a:t>Say it in words</a:t>
-            </a:r>
-          </a:p>
-          <a:p>
-            <a:pPr algn="l">
-              <a:spcBef>
-                <a:spcPts val="600"/>
-              </a:spcBef>
-            </a:pPr>
-            <a:r>
-              <a:rPr sz="1150" b="0">
-                <a:solidFill>
-                  <a:srgbClr val="1B2A41"/>
-                </a:solidFill>
-              </a:rPr>
-              <a:t>Out of a hundred loans like this one, four go bad. When one goes bad we lose 45 paise in the rupee on the ₹8 lakh still outstanding. So we price ₹14,400 into every loan, whether it goes bad or not.</a:t>
-            </a:r>
-          </a:p>
-        </p:txBody>
-      </p:sp>
-      <p:sp>
-        <p:nvSpPr>
-          <p:cNvPr id="27" name="TextBox 26"/>
-          <p:cNvSpPr txBox="1"/>
-          <p:nvPr/>
-        </p:nvSpPr>
-        <p:spPr>
-          <a:xfrm>
-            <a:off x="6309360" y="4572000"/>
-            <a:ext cx="5330952" cy="1097280"/>
-          </a:xfrm>
-          <a:prstGeom prst="rect">
-            <a:avLst/>
-          </a:prstGeom>
-          <a:noFill/>
-        </p:spPr>
-        <p:txBody>
-          <a:bodyPr wrap="square" lIns="0" tIns="0" rIns="0" bIns="0" anchor="t">
-            <a:spAutoFit/>
-          </a:bodyPr>
-          <a:lstStyle/>
-          <a:p>
-            <a:pPr algn="l"/>
-            <a:r>
-              <a:rPr sz="1500" b="1">
-                <a:solidFill>
-                  <a:srgbClr val="0F2145"/>
-                </a:solidFill>
-                <a:latin typeface="Georgia"/>
-              </a:rPr>
-              <a:t>The part students miss</a:t>
-            </a:r>
-          </a:p>
-          <a:p>
-            <a:pPr algn="l">
-              <a:spcBef>
-                <a:spcPts val="600"/>
-              </a:spcBef>
-            </a:pPr>
-            <a:r>
-              <a:rPr sz="1150" b="0">
-                <a:solidFill>
-                  <a:srgbClr val="1B2A41"/>
-                </a:solidFill>
-              </a:rPr>
-              <a:t>Expected loss is a cost, not a surprise. It is budgeted and priced in. Capital is held for the UNEXPECTED loss, which is the year four loans becomes eleven.</a:t>
-            </a:r>
-          </a:p>
-        </p:txBody>
-      </p:sp>
-      <p:sp>
-        <p:nvSpPr>
-          <p:cNvPr id="28" name="Rectangle 27"/>
-          <p:cNvSpPr/>
-          <p:nvPr/>
-        </p:nvSpPr>
-        <p:spPr>
-          <a:xfrm>
-            <a:off x="548640" y="5760720"/>
-            <a:ext cx="11091672" cy="603504"/>
-          </a:xfrm>
-          <a:prstGeom prst="rect">
-            <a:avLst/>
-          </a:prstGeom>
-          <a:solidFill>
-            <a:srgbClr val="0F2145"/>
-          </a:solidFill>
-          <a:ln>
-            <a:noFill/>
-          </a:ln>
-          <a:effectLst/>
-        </p:spPr>
-        <p:style>
-          <a:lnRef idx="1">
-            <a:schemeClr val="accent1"/>
-          </a:lnRef>
-          <a:fillRef idx="3">
-            <a:schemeClr val="accent1"/>
-          </a:fillRef>
-          <a:effectRef idx="2">
-            <a:schemeClr val="accent1"/>
-          </a:effectRef>
-          <a:fontRef idx="minor">
-            <a:schemeClr val="lt1"/>
-          </a:fontRef>
-        </p:style>
-        <p:txBody>
-          <a:bodyPr rtlCol="0" anchor="ctr"/>
-          <a:lstStyle/>
-          <a:p>
-            <a:pPr algn="ctr"/>
-            <a:endParaRPr/>
-          </a:p>
-        </p:txBody>
-      </p:sp>
-      <p:sp>
-        <p:nvSpPr>
-          <p:cNvPr id="29" name="Rectangle 28"/>
-          <p:cNvSpPr/>
-          <p:nvPr/>
-        </p:nvSpPr>
-        <p:spPr>
-          <a:xfrm>
-            <a:off x="548640" y="5760720"/>
-            <a:ext cx="64008" cy="603504"/>
-          </a:xfrm>
-          <a:prstGeom prst="rect">
-            <a:avLst/>
-          </a:prstGeom>
-          <a:solidFill>
-            <a:srgbClr val="C9A227"/>
-          </a:solidFill>
-          <a:ln>
-            <a:noFill/>
-          </a:ln>
-          <a:effectLst/>
-        </p:spPr>
-        <p:style>
-          <a:lnRef idx="1">
-            <a:schemeClr val="accent1"/>
-          </a:lnRef>
-          <a:fillRef idx="3">
-            <a:schemeClr val="accent1"/>
-          </a:fillRef>
-          <a:effectRef idx="2">
-            <a:schemeClr val="accent1"/>
-          </a:effectRef>
-          <a:fontRef idx="minor">
-            <a:schemeClr val="lt1"/>
-          </a:fontRef>
-        </p:style>
-        <p:txBody>
-          <a:bodyPr rtlCol="0" anchor="ctr"/>
-          <a:lstStyle/>
-          <a:p>
-            <a:pPr algn="ctr"/>
-            <a:endParaRPr/>
-          </a:p>
-        </p:txBody>
-      </p:sp>
-      <p:sp>
-        <p:nvSpPr>
-          <p:cNvPr id="30" name="TextBox 29"/>
-          <p:cNvSpPr txBox="1"/>
-          <p:nvPr/>
-        </p:nvSpPr>
-        <p:spPr>
-          <a:xfrm>
-            <a:off x="822960" y="5760720"/>
-            <a:ext cx="10543032" cy="603504"/>
-          </a:xfrm>
-          <a:prstGeom prst="rect">
-            <a:avLst/>
-          </a:prstGeom>
-          <a:noFill/>
-        </p:spPr>
-        <p:txBody>
-          <a:bodyPr wrap="square" lIns="0" tIns="0" rIns="0" bIns="0" anchor="ctr">
-            <a:spAutoFit/>
-          </a:bodyPr>
-          <a:lstStyle/>
-          <a:p>
-            <a:pPr algn="l"/>
-            <a:r>
-              <a:rPr sz="1200" b="1">
-                <a:solidFill>
-                  <a:srgbClr val="C9A227"/>
-                </a:solidFill>
-              </a:rPr>
-              <a:t>Basel II, in one sentence:  </a:t>
-            </a:r>
-            <a:r>
-              <a:rPr sz="1200" b="0">
-                <a:solidFill>
-                  <a:srgbClr val="FFFFFF"/>
-                </a:solidFill>
-              </a:rPr>
-              <a:t>a bank that can prove its own PD, LGD and EAD models work is allowed to use them to set its own capital.</a:t>
-            </a:r>
-          </a:p>
-        </p:txBody>
-      </p:sp>
-      <p:sp>
-        <p:nvSpPr>
-          <p:cNvPr id="31" name="TextBox 30"/>
-          <p:cNvSpPr txBox="1"/>
-          <p:nvPr/>
-        </p:nvSpPr>
-        <p:spPr>
-          <a:xfrm>
-            <a:off x="548640" y="6473952"/>
-            <a:ext cx="7315200" cy="228600"/>
-          </a:xfrm>
-          <a:prstGeom prst="rect">
-            <a:avLst/>
-          </a:prstGeom>
-          <a:noFill/>
-        </p:spPr>
-        <p:txBody>
-          <a:bodyPr wrap="square" lIns="0" tIns="0" rIns="0" bIns="0" anchor="t">
-            <a:spAutoFit/>
-          </a:bodyPr>
-          <a:lstStyle/>
-          <a:p>
-            <a:pPr algn="l"/>
-            <a:r>
-              <a:rPr sz="800" b="0">
-                <a:solidFill>
-                  <a:srgbClr val="5D6B7E"/>
-                </a:solidFill>
-              </a:rPr>
-              <a:t>ISBMS · PGDM 2025–27 · AGENTIC AI &amp; ADVANCED ANALYTICS IN FINANCE</a:t>
-            </a:r>
-          </a:p>
-        </p:txBody>
-      </p:sp>
-      <p:sp>
-        <p:nvSpPr>
-          <p:cNvPr id="32" name="TextBox 31"/>
-          <p:cNvSpPr txBox="1"/>
-          <p:nvPr/>
-        </p:nvSpPr>
-        <p:spPr>
-          <a:xfrm>
-            <a:off x="9262872" y="6473952"/>
-            <a:ext cx="2377440" cy="228600"/>
-          </a:xfrm>
-          <a:prstGeom prst="rect">
-            <a:avLst/>
-          </a:prstGeom>
-          <a:noFill/>
-        </p:spPr>
-        <p:txBody>
-          <a:bodyPr wrap="square" lIns="0" tIns="0" rIns="0" bIns="0" anchor="t">
-            <a:spAutoFit/>
-          </a:bodyPr>
-          <a:lstStyle/>
-          <a:p>
-            <a:pPr algn="r"/>
-            <a:r>
-              <a:rPr sz="800" b="0">
-                <a:solidFill>
-                  <a:srgbClr val="5D6B7E"/>
-                </a:solidFill>
-              </a:rPr>
-              <a:t>MODULE 5  ·  04</a:t>
-            </a:r>
-          </a:p>
-        </p:txBody>
-      </p:sp>
-    </p:spTree>
-  </p:cSld>
-  <p:clrMapOvr>
-    <a:masterClrMapping/>
-  </p:clrMapOvr>
-</p:sld>
-</file>
-
 <file path=ppt/slides/slide6.xml><?xml version="1.0" encoding="utf-8"?>
 <p:sld xmlns:a="http://schemas.openxmlformats.org/drawingml/2006/main" xmlns:r="http://schemas.openxmlformats.org/officeDocument/2006/relationships" xmlns:p="http://schemas.openxmlformats.org/presentationml/2006/main">
   <p:cSld>
@@ -14736,7 +14736,7 @@
                   <a:srgbClr val="C9A227"/>
                 </a:solidFill>
               </a:rPr>
-              <a:t>▪  </a:t>
+              <a:t>▪</a:t>
             </a:r>
             <a:r>
               <a:rPr sz="950" b="0">
@@ -14778,7 +14778,7 @@
                   <a:srgbClr val="C9A227"/>
                 </a:solidFill>
               </a:rPr>
-              <a:t>▪  </a:t>
+              <a:t>▪</a:t>
             </a:r>
             <a:r>
               <a:rPr sz="950" b="0">
@@ -14820,7 +14820,7 @@
                   <a:srgbClr val="C9A227"/>
                 </a:solidFill>
               </a:rPr>
-              <a:t>▪  </a:t>
+              <a:t>▪</a:t>
             </a:r>
             <a:r>
               <a:rPr sz="950" b="0">
@@ -14862,7 +14862,7 @@
                   <a:srgbClr val="C9A227"/>
                 </a:solidFill>
               </a:rPr>
-              <a:t>▪  </a:t>
+              <a:t>▪</a:t>
             </a:r>
             <a:r>
               <a:rPr sz="950" b="0">
@@ -15018,7 +15018,7 @@
                   <a:srgbClr val="C9A227"/>
                 </a:solidFill>
               </a:rPr>
-              <a:t>▪  </a:t>
+              <a:t>▪</a:t>
             </a:r>
             <a:r>
               <a:rPr sz="950" b="0">
@@ -15060,7 +15060,7 @@
                   <a:srgbClr val="C9A227"/>
                 </a:solidFill>
               </a:rPr>
-              <a:t>▪  </a:t>
+              <a:t>▪</a:t>
             </a:r>
             <a:r>
               <a:rPr sz="950" b="0">
@@ -15102,7 +15102,7 @@
                   <a:srgbClr val="C9A227"/>
                 </a:solidFill>
               </a:rPr>
-              <a:t>▪  </a:t>
+              <a:t>▪</a:t>
             </a:r>
             <a:r>
               <a:rPr sz="950" b="0">
@@ -15144,7 +15144,7 @@
                   <a:srgbClr val="C9A227"/>
                 </a:solidFill>
               </a:rPr>
-              <a:t>▪  </a:t>
+              <a:t>▪</a:t>
             </a:r>
             <a:r>
               <a:rPr sz="950" b="0">
@@ -15415,7 +15415,7 @@
                   <a:srgbClr val="C9A227"/>
                 </a:solidFill>
               </a:rPr>
-              <a:t>Basel II is a bargain, not a gift:  </a:t>
+              <a:t>Basel II is a bargain, not a gift:</a:t>
             </a:r>
             <a:r>
               <a:rPr sz="1200" b="0">
@@ -15457,7 +15457,7 @@
                   <a:srgbClr val="5D6B7E"/>
                 </a:solidFill>
               </a:rPr>
-              <a:t>ISBMS · PGDM 2025–27 · AGENTIC AI &amp; ADVANCED ANALYTICS IN FINANCE</a:t>
+              <a:t>AI IN FINANCE · THE COMPLETE CRASH COURSE</a:t>
             </a:r>
           </a:p>
         </p:txBody>
@@ -15611,7 +15611,7 @@
                   <a:srgbClr val="C9A227"/>
                 </a:solidFill>
               </a:rPr>
-              <a:t> </a:t>
+              <a:t/>
             </a:r>
             <a:r>
               <a:rPr lang="en-US" sz="1100" b="1" dirty="0" err="1">
@@ -15627,7 +15627,7 @@
                   <a:srgbClr val="C9A227"/>
                 </a:solidFill>
               </a:rPr>
-              <a:t> of Default </a:t>
+              <a:t>of Default</a:t>
             </a:r>
           </a:p>
           <a:p>
@@ -15638,7 +15638,7 @@
                   <a:srgbClr val="C9A227"/>
                 </a:solidFill>
               </a:rPr>
-              <a:t> MODEL</a:t>
+              <a:t>MODEL</a:t>
             </a:r>
           </a:p>
         </p:txBody>
@@ -15682,7 +15682,7 @@
                 </a:solidFill>
                 <a:latin typeface="Georgia"/>
               </a:rPr>
-              <a:t> – Logistical Regression</a:t>
+              <a:t>– Logistical Regression</a:t>
             </a:r>
             <a:endParaRPr sz="2900" b="1" dirty="0">
               <a:solidFill>
@@ -16417,7 +16417,7 @@
                 </a:solidFill>
                 <a:latin typeface="Georgia"/>
               </a:rPr>
-              <a:t>SCORE  =  −3.2  +  (0.8 × debt to equity)  −  (0.5 × interest cover)  +  (0.4 × times late)      </a:t>
+              <a:t>SCORE  =  −3.2  +  (0.8 × debt to equity)  −  (0.5 × interest cover)  +  (0.4 × times late)</a:t>
             </a:r>
             <a:r>
               <a:rPr sz="1400" b="1">
@@ -16650,7 +16650,7 @@
                   <a:srgbClr val="C9A227"/>
                 </a:solidFill>
               </a:rPr>
-              <a:t>Do it live:  </a:t>
+              <a:t>Do it live:</a:t>
             </a:r>
             <a:r>
               <a:rPr sz="1200" b="0">
@@ -16692,7 +16692,7 @@
                   <a:srgbClr val="5D6B7E"/>
                 </a:solidFill>
               </a:rPr>
-              <a:t>ISBMS · PGDM 2025–27 · AGENTIC AI &amp; ADVANCED ANALYTICS IN FINANCE</a:t>
+              <a:t>AI IN FINANCE · THE COMPLETE CRASH COURSE</a:t>
             </a:r>
           </a:p>
         </p:txBody>
@@ -17039,7 +17039,7 @@
                   <a:srgbClr val="C9A227"/>
                 </a:solidFill>
               </a:rPr>
-              <a:t>+  </a:t>
+              <a:t>+</a:t>
             </a:r>
             <a:r>
               <a:rPr sz="1000" b="0">
@@ -17081,7 +17081,7 @@
                   <a:srgbClr val="C9A227"/>
                 </a:solidFill>
               </a:rPr>
-              <a:t>−  </a:t>
+              <a:t>−</a:t>
             </a:r>
             <a:r>
               <a:rPr sz="1000" b="0">
@@ -17237,7 +17237,7 @@
                   <a:srgbClr val="C9A227"/>
                 </a:solidFill>
               </a:rPr>
-              <a:t>+  </a:t>
+              <a:t>+</a:t>
             </a:r>
             <a:r>
               <a:rPr sz="1000" b="0">
@@ -17279,7 +17279,7 @@
                   <a:srgbClr val="C9A227"/>
                 </a:solidFill>
               </a:rPr>
-              <a:t>−  </a:t>
+              <a:t>−</a:t>
             </a:r>
             <a:r>
               <a:rPr sz="1000" b="0">
@@ -17435,7 +17435,7 @@
                   <a:srgbClr val="C9A227"/>
                 </a:solidFill>
               </a:rPr>
-              <a:t>+  </a:t>
+              <a:t>+</a:t>
             </a:r>
             <a:r>
               <a:rPr sz="1000" b="0">
@@ -17477,7 +17477,7 @@
                   <a:srgbClr val="C9A227"/>
                 </a:solidFill>
               </a:rPr>
-              <a:t>−  </a:t>
+              <a:t>−</a:t>
             </a:r>
             <a:r>
               <a:rPr sz="1000" b="0">
@@ -17748,7 +17748,7 @@
                   <a:srgbClr val="C9A227"/>
                 </a:solidFill>
               </a:rPr>
-              <a:t>The rule of thumb:  </a:t>
+              <a:t>The rule of thumb:</a:t>
             </a:r>
             <a:r>
               <a:rPr sz="1200" b="0">
@@ -17790,7 +17790,7 @@
                   <a:srgbClr val="5D6B7E"/>
                 </a:solidFill>
               </a:rPr>
-              <a:t>ISBMS · PGDM 2025–27 · AGENTIC AI &amp; ADVANCED ANALYTICS IN FINANCE</a:t>
+              <a:t>AI IN FINANCE · THE COMPLETE CRASH COURSE</a:t>
             </a:r>
           </a:p>
         </p:txBody>
